--- a/outputs/flyers/USMLE_Step2_Flyer.pptx
+++ b/outputs/flyers/USMLE_Step2_Flyer.pptx
@@ -933,7 +933,7 @@
                 <a:ea typeface="Calibri" pitchFamily="34" charset="-122"/>
                 <a:cs typeface="Calibri" pitchFamily="34" charset="-120"/>
               </a:rPr>
-              <a:t>USMLE Tutoring · 2026 Cohort</a:t>
+              <a:t>Enrolling now · July–October cohort</a:t>
             </a:r>
             <a:endParaRPr lang="en-US" sz="1100" dirty="0"/>
           </a:p>
@@ -1256,8 +1256,8 @@
         </p:nvSpPr>
         <p:spPr>
           <a:xfrm>
-            <a:off x="1417320" y="1965960"/>
-            <a:ext cx="5852160" cy="310896"/>
+            <a:off x="1417320" y="1947672"/>
+            <a:ext cx="5852160" cy="292608"/>
           </a:xfrm>
           <a:prstGeom prst="rect">
             <a:avLst/>
@@ -1281,7 +1281,7 @@
                 <a:ea typeface="Calibri" pitchFamily="34" charset="-122"/>
                 <a:cs typeface="Calibri" pitchFamily="34" charset="-120"/>
               </a:rPr>
-              <a:t>Allan Bakesiga</a:t>
+              <a:t>Allan Bakesiga, MD</a:t>
             </a:r>
             <a:endParaRPr lang="en-US" sz="1600" dirty="0"/>
           </a:p>
@@ -1295,7 +1295,7 @@
         </p:nvSpPr>
         <p:spPr>
           <a:xfrm>
-            <a:off x="1417320" y="2258568"/>
+            <a:off x="1417320" y="2240280"/>
             <a:ext cx="5852160" cy="237744"/>
           </a:xfrm>
           <a:prstGeom prst="rect">
@@ -1312,7 +1312,7 @@
               <a:buNone/>
             </a:pPr>
             <a:r>
-              <a:rPr lang="en-US" sz="1100" dirty="0">
+              <a:rPr lang="en-US" sz="1050" dirty="0">
                 <a:solidFill>
                   <a:srgbClr val="345671"/>
                 </a:solidFill>
@@ -1320,9 +1320,9 @@
                 <a:ea typeface="Calibri" pitchFamily="34" charset="-122"/>
                 <a:cs typeface="Calibri" pitchFamily="34" charset="-120"/>
               </a:rPr>
-              <a:t>MD candidate · Duke University · Daily USMLE study lead</a:t>
-            </a:r>
-            <a:endParaRPr lang="en-US" sz="1100" dirty="0"/>
+              <a:t>MD (Makerere)  ·  MScGH (Duke)  ·  Incoming PGY-1 Neurology, Creighton</a:t>
+            </a:r>
+            <a:endParaRPr lang="en-US" sz="1050" dirty="0"/>
           </a:p>
         </p:txBody>
       </p:sp>
@@ -1334,7 +1334,7 @@
         </p:nvSpPr>
         <p:spPr>
           <a:xfrm>
-            <a:off x="1417320" y="2468880"/>
+            <a:off x="1417320" y="2459736"/>
             <a:ext cx="5852160" cy="219456"/>
           </a:xfrm>
           <a:prstGeom prst="rect">
@@ -1351,15 +1351,15 @@
               <a:buNone/>
             </a:pPr>
             <a:r>
-              <a:rPr lang="en-US" sz="1000" dirty="0">
-                <a:solidFill>
-                  <a:srgbClr val="6B87A3"/>
+              <a:rPr lang="en-US" sz="1000" i="1" dirty="0">
+                <a:solidFill>
+                  <a:srgbClr val="B45309"/>
                 </a:solidFill>
                 <a:latin typeface="Calibri" pitchFamily="34" charset="0"/>
                 <a:ea typeface="Calibri" pitchFamily="34" charset="-122"/>
                 <a:cs typeface="Calibri" pitchFamily="34" charset="-120"/>
               </a:rPr>
-              <a:t>Neurology / neurosurgery research · Active residency applicant</a:t>
+              <a:t>Epidemiology &amp; biostatistics teaching assistant</a:t>
             </a:r>
             <a:endParaRPr lang="en-US" sz="1000" dirty="0"/>
           </a:p>
@@ -2517,8 +2517,8 @@
         </p:nvSpPr>
         <p:spPr>
           <a:xfrm>
-            <a:off x="457200" y="6766560"/>
-            <a:ext cx="6858000" cy="777240"/>
+            <a:off x="457200" y="6784848"/>
+            <a:ext cx="6858000" cy="502920"/>
           </a:xfrm>
           <a:prstGeom prst="rect">
             <a:avLst/>
@@ -2534,7 +2534,7 @@
               <a:buNone/>
             </a:pPr>
             <a:r>
-              <a:rPr lang="en-US" sz="1200" dirty="0">
+              <a:rPr lang="en-US" sz="1150" dirty="0">
                 <a:solidFill>
                   <a:srgbClr val="0C2A3D"/>
                 </a:solidFill>
@@ -2544,7 +2544,7 @@
               </a:rPr>
               <a:t>Internal Medicine  ·  Surgery  ·  OB-GYN  ·  Pediatrics  ·  Psychiatry  ·  Family Medicine  ·  Preventive Medicine  ·  Ethics  ·  Biostatistics  ·  Patient Safety</a:t>
             </a:r>
-            <a:endParaRPr lang="en-US" sz="1200" dirty="0"/>
+            <a:endParaRPr lang="en-US" sz="1150" dirty="0"/>
           </a:p>
         </p:txBody>
       </p:sp>

--- a/outputs/flyers/USMLE_Step2_Flyer.pptx
+++ b/outputs/flyers/USMLE_Step2_Flyer.pptx
@@ -908,8 +908,8 @@
         </p:nvSpPr>
         <p:spPr>
           <a:xfrm>
-            <a:off x="457200" y="320040"/>
-            <a:ext cx="4457700" cy="274320"/>
+            <a:off x="457200" y="256032"/>
+            <a:ext cx="4457700" cy="201168"/>
           </a:xfrm>
           <a:prstGeom prst="rect">
             <a:avLst/>
@@ -925,7 +925,7 @@
               <a:buNone/>
             </a:pPr>
             <a:r>
-              <a:rPr lang="en-US" sz="1100" b="1" spc="400" kern="0" dirty="0">
+              <a:rPr lang="en-US" sz="1000" b="1" spc="400" kern="0" dirty="0">
                 <a:solidFill>
                   <a:srgbClr val="FFFFFF"/>
                 </a:solidFill>
@@ -935,7 +935,7 @@
               </a:rPr>
               <a:t>Enrolling now · July–October cohort</a:t>
             </a:r>
-            <a:endParaRPr lang="en-US" sz="1100" dirty="0"/>
+            <a:endParaRPr lang="en-US" sz="1000" dirty="0"/>
           </a:p>
         </p:txBody>
       </p:sp>
@@ -947,8 +947,8 @@
         </p:nvSpPr>
         <p:spPr>
           <a:xfrm>
-            <a:off x="457200" y="566928"/>
-            <a:ext cx="4457700" cy="777240"/>
+            <a:off x="457200" y="457200"/>
+            <a:ext cx="4457700" cy="274320"/>
           </a:xfrm>
           <a:prstGeom prst="rect">
             <a:avLst/>
@@ -964,7 +964,7 @@
               <a:buNone/>
             </a:pPr>
             <a:r>
-              <a:rPr lang="en-US" sz="5600" b="1" dirty="0">
+              <a:rPr lang="en-US" sz="2200" b="1" spc="800" kern="0" dirty="0">
                 <a:solidFill>
                   <a:srgbClr val="FFFFFF"/>
                 </a:solidFill>
@@ -972,22 +972,61 @@
                 <a:ea typeface="Arial Black" pitchFamily="34" charset="-122"/>
                 <a:cs typeface="Arial Black" pitchFamily="34" charset="-120"/>
               </a:rPr>
+              <a:t>USMLE</a:t>
+            </a:r>
+            <a:endParaRPr lang="en-US" sz="2200" dirty="0"/>
+          </a:p>
+        </p:txBody>
+      </p:sp>
+      <p:sp>
+        <p:nvSpPr>
+          <p:cNvPr id="5" name="Text 3"/>
+          <p:cNvSpPr/>
+          <p:nvPr/>
+        </p:nvSpPr>
+        <p:spPr>
+          <a:xfrm>
+            <a:off x="457200" y="749808"/>
+            <a:ext cx="4457700" cy="713232"/>
+          </a:xfrm>
+          <a:prstGeom prst="rect">
+            <a:avLst/>
+          </a:prstGeom>
+          <a:noFill/>
+          <a:ln/>
+        </p:spPr>
+        <p:txBody>
+          <a:bodyPr wrap="square" lIns="0" tIns="0" rIns="0" bIns="0" rtlCol="0" anchor="ctr"/>
+          <a:lstStyle/>
+          <a:p>
+            <a:pPr indent="0" marL="0">
+              <a:buNone/>
+            </a:pPr>
+            <a:r>
+              <a:rPr lang="en-US" sz="4800" b="1" dirty="0">
+                <a:solidFill>
+                  <a:srgbClr val="FFFFFF"/>
+                </a:solidFill>
+                <a:latin typeface="Arial Black" pitchFamily="34" charset="0"/>
+                <a:ea typeface="Arial Black" pitchFamily="34" charset="-122"/>
+                <a:cs typeface="Arial Black" pitchFamily="34" charset="-120"/>
+              </a:rPr>
               <a:t>Step 2 CK</a:t>
             </a:r>
-            <a:endParaRPr lang="en-US" sz="5600" dirty="0"/>
-          </a:p>
-        </p:txBody>
-      </p:sp>
-      <p:sp>
-        <p:nvSpPr>
-          <p:cNvPr id="5" name="Text 3"/>
-          <p:cNvSpPr/>
-          <p:nvPr/>
-        </p:nvSpPr>
-        <p:spPr>
-          <a:xfrm>
-            <a:off x="457200" y="1335024"/>
-            <a:ext cx="5829300" cy="292608"/>
+            <a:endParaRPr lang="en-US" sz="4800" dirty="0"/>
+          </a:p>
+        </p:txBody>
+      </p:sp>
+      <p:sp>
+        <p:nvSpPr>
+          <p:cNvPr id="6" name="Text 4"/>
+          <p:cNvSpPr/>
+          <p:nvPr/>
+        </p:nvSpPr>
+        <p:spPr>
+          <a:xfrm>
+            <a:off x="457200" y="1444752"/>
+            <a:ext cx="5829300" cy="219456"/>
           </a:xfrm>
           <a:prstGeom prst="rect">
             <a:avLst/>
@@ -1003,7 +1042,7 @@
               <a:buNone/>
             </a:pPr>
             <a:r>
-              <a:rPr lang="en-US" sz="1400" i="1" dirty="0">
+              <a:rPr lang="en-US" sz="1200" i="1" dirty="0">
                 <a:solidFill>
                   <a:srgbClr val="FFFFFF"/>
                 </a:solidFill>
@@ -1013,13 +1052,13 @@
               </a:rPr>
               <a:t>Sharpen clinical reasoning. Move from facts to bedside decisions.</a:t>
             </a:r>
-            <a:endParaRPr lang="en-US" sz="1400" dirty="0"/>
-          </a:p>
-        </p:txBody>
-      </p:sp>
-      <p:sp>
-        <p:nvSpPr>
-          <p:cNvPr id="6" name="Shape 4"/>
+            <a:endParaRPr lang="en-US" sz="1200" dirty="0"/>
+          </a:p>
+        </p:txBody>
+      </p:sp>
+      <p:sp>
+        <p:nvSpPr>
+          <p:cNvPr id="7" name="Shape 5"/>
           <p:cNvSpPr/>
           <p:nvPr/>
         </p:nvSpPr>
@@ -1044,7 +1083,7 @@
       </p:sp>
       <p:sp>
         <p:nvSpPr>
-          <p:cNvPr id="7" name="Text 5"/>
+          <p:cNvPr id="8" name="Text 6"/>
           <p:cNvSpPr/>
           <p:nvPr/>
         </p:nvSpPr>
@@ -1083,7 +1122,7 @@
       </p:sp>
       <p:sp>
         <p:nvSpPr>
-          <p:cNvPr id="8" name="Text 6"/>
+          <p:cNvPr id="9" name="Text 7"/>
           <p:cNvSpPr/>
           <p:nvPr/>
         </p:nvSpPr>
@@ -1122,7 +1161,7 @@
       </p:sp>
       <p:sp>
         <p:nvSpPr>
-          <p:cNvPr id="9" name="Text 7"/>
+          <p:cNvPr id="10" name="Text 8"/>
           <p:cNvSpPr/>
           <p:nvPr/>
         </p:nvSpPr>
@@ -1161,7 +1200,7 @@
       </p:sp>
       <p:sp>
         <p:nvSpPr>
-          <p:cNvPr id="10" name="Shape 8"/>
+          <p:cNvPr id="11" name="Shape 9"/>
           <p:cNvSpPr/>
           <p:nvPr/>
         </p:nvSpPr>
@@ -1186,7 +1225,7 @@
       </p:sp>
       <p:sp>
         <p:nvSpPr>
-          <p:cNvPr id="11" name="Shape 9"/>
+          <p:cNvPr id="12" name="Shape 10"/>
           <p:cNvSpPr/>
           <p:nvPr/>
         </p:nvSpPr>
@@ -1211,7 +1250,7 @@
       </p:sp>
       <p:sp>
         <p:nvSpPr>
-          <p:cNvPr id="12" name="Text 10"/>
+          <p:cNvPr id="13" name="Text 11"/>
           <p:cNvSpPr/>
           <p:nvPr/>
         </p:nvSpPr>
@@ -1250,7 +1289,7 @@
       </p:sp>
       <p:sp>
         <p:nvSpPr>
-          <p:cNvPr id="13" name="Text 11"/>
+          <p:cNvPr id="14" name="Text 12"/>
           <p:cNvSpPr/>
           <p:nvPr/>
         </p:nvSpPr>
@@ -1289,7 +1328,7 @@
       </p:sp>
       <p:sp>
         <p:nvSpPr>
-          <p:cNvPr id="14" name="Text 12"/>
+          <p:cNvPr id="15" name="Text 13"/>
           <p:cNvSpPr/>
           <p:nvPr/>
         </p:nvSpPr>
@@ -1328,7 +1367,7 @@
       </p:sp>
       <p:sp>
         <p:nvSpPr>
-          <p:cNvPr id="15" name="Text 13"/>
+          <p:cNvPr id="16" name="Text 14"/>
           <p:cNvSpPr/>
           <p:nvPr/>
         </p:nvSpPr>
@@ -1367,7 +1406,7 @@
       </p:sp>
       <p:sp>
         <p:nvSpPr>
-          <p:cNvPr id="16" name="Shape 14"/>
+          <p:cNvPr id="17" name="Shape 15"/>
           <p:cNvSpPr/>
           <p:nvPr/>
         </p:nvSpPr>
@@ -1392,7 +1431,7 @@
       </p:sp>
       <p:sp>
         <p:nvSpPr>
-          <p:cNvPr id="17" name="Text 15"/>
+          <p:cNvPr id="18" name="Text 16"/>
           <p:cNvSpPr/>
           <p:nvPr/>
         </p:nvSpPr>
@@ -1431,7 +1470,7 @@
       </p:sp>
       <p:sp>
         <p:nvSpPr>
-          <p:cNvPr id="18" name="Text 16"/>
+          <p:cNvPr id="19" name="Text 17"/>
           <p:cNvSpPr/>
           <p:nvPr/>
         </p:nvSpPr>
@@ -1470,7 +1509,7 @@
       </p:sp>
       <p:sp>
         <p:nvSpPr>
-          <p:cNvPr id="19" name="Shape 17"/>
+          <p:cNvPr id="20" name="Shape 18"/>
           <p:cNvSpPr/>
           <p:nvPr/>
         </p:nvSpPr>
@@ -1495,7 +1534,7 @@
       </p:sp>
       <p:sp>
         <p:nvSpPr>
-          <p:cNvPr id="20" name="Text 18"/>
+          <p:cNvPr id="21" name="Text 19"/>
           <p:cNvSpPr/>
           <p:nvPr/>
         </p:nvSpPr>
@@ -1534,7 +1573,7 @@
       </p:sp>
       <p:sp>
         <p:nvSpPr>
-          <p:cNvPr id="21" name="Text 19"/>
+          <p:cNvPr id="22" name="Text 20"/>
           <p:cNvSpPr/>
           <p:nvPr/>
         </p:nvSpPr>
@@ -1573,7 +1612,7 @@
       </p:sp>
       <p:sp>
         <p:nvSpPr>
-          <p:cNvPr id="22" name="Shape 20"/>
+          <p:cNvPr id="23" name="Shape 21"/>
           <p:cNvSpPr/>
           <p:nvPr/>
         </p:nvSpPr>
@@ -1598,7 +1637,7 @@
       </p:sp>
       <p:sp>
         <p:nvSpPr>
-          <p:cNvPr id="23" name="Text 21"/>
+          <p:cNvPr id="24" name="Text 22"/>
           <p:cNvSpPr/>
           <p:nvPr/>
         </p:nvSpPr>
@@ -1637,7 +1676,7 @@
       </p:sp>
       <p:sp>
         <p:nvSpPr>
-          <p:cNvPr id="24" name="Text 22"/>
+          <p:cNvPr id="25" name="Text 23"/>
           <p:cNvSpPr/>
           <p:nvPr/>
         </p:nvSpPr>
@@ -1676,7 +1715,7 @@
       </p:sp>
       <p:sp>
         <p:nvSpPr>
-          <p:cNvPr id="25" name="Shape 23"/>
+          <p:cNvPr id="26" name="Shape 24"/>
           <p:cNvSpPr/>
           <p:nvPr/>
         </p:nvSpPr>
@@ -1708,7 +1747,7 @@
       </p:sp>
       <p:sp>
         <p:nvSpPr>
-          <p:cNvPr id="26" name="Shape 24"/>
+          <p:cNvPr id="27" name="Shape 25"/>
           <p:cNvSpPr/>
           <p:nvPr/>
         </p:nvSpPr>
@@ -1733,7 +1772,7 @@
       </p:sp>
       <p:sp>
         <p:nvSpPr>
-          <p:cNvPr id="27" name="Shape 25"/>
+          <p:cNvPr id="28" name="Shape 26"/>
           <p:cNvSpPr/>
           <p:nvPr/>
         </p:nvSpPr>
@@ -1758,7 +1797,7 @@
       </p:sp>
       <p:sp>
         <p:nvSpPr>
-          <p:cNvPr id="28" name="Text 26"/>
+          <p:cNvPr id="29" name="Text 27"/>
           <p:cNvSpPr/>
           <p:nvPr/>
         </p:nvSpPr>
@@ -1797,7 +1836,7 @@
       </p:sp>
       <p:sp>
         <p:nvSpPr>
-          <p:cNvPr id="29" name="Text 27"/>
+          <p:cNvPr id="30" name="Text 28"/>
           <p:cNvSpPr/>
           <p:nvPr/>
         </p:nvSpPr>
@@ -1836,7 +1875,7 @@
       </p:sp>
       <p:sp>
         <p:nvSpPr>
-          <p:cNvPr id="30" name="Text 28"/>
+          <p:cNvPr id="31" name="Text 29"/>
           <p:cNvSpPr/>
           <p:nvPr/>
         </p:nvSpPr>
@@ -1875,7 +1914,7 @@
       </p:sp>
       <p:sp>
         <p:nvSpPr>
-          <p:cNvPr id="31" name="Shape 29"/>
+          <p:cNvPr id="32" name="Shape 30"/>
           <p:cNvSpPr/>
           <p:nvPr/>
         </p:nvSpPr>
@@ -1907,7 +1946,7 @@
       </p:sp>
       <p:sp>
         <p:nvSpPr>
-          <p:cNvPr id="32" name="Shape 30"/>
+          <p:cNvPr id="33" name="Shape 31"/>
           <p:cNvSpPr/>
           <p:nvPr/>
         </p:nvSpPr>
@@ -1932,7 +1971,7 @@
       </p:sp>
       <p:sp>
         <p:nvSpPr>
-          <p:cNvPr id="33" name="Shape 31"/>
+          <p:cNvPr id="34" name="Shape 32"/>
           <p:cNvSpPr/>
           <p:nvPr/>
         </p:nvSpPr>
@@ -1957,7 +1996,7 @@
       </p:sp>
       <p:sp>
         <p:nvSpPr>
-          <p:cNvPr id="34" name="Text 32"/>
+          <p:cNvPr id="35" name="Text 33"/>
           <p:cNvSpPr/>
           <p:nvPr/>
         </p:nvSpPr>
@@ -1996,7 +2035,7 @@
       </p:sp>
       <p:sp>
         <p:nvSpPr>
-          <p:cNvPr id="35" name="Text 33"/>
+          <p:cNvPr id="36" name="Text 34"/>
           <p:cNvSpPr/>
           <p:nvPr/>
         </p:nvSpPr>
@@ -2035,7 +2074,7 @@
       </p:sp>
       <p:sp>
         <p:nvSpPr>
-          <p:cNvPr id="36" name="Text 34"/>
+          <p:cNvPr id="37" name="Text 35"/>
           <p:cNvSpPr/>
           <p:nvPr/>
         </p:nvSpPr>
@@ -2074,7 +2113,7 @@
       </p:sp>
       <p:sp>
         <p:nvSpPr>
-          <p:cNvPr id="37" name="Shape 35"/>
+          <p:cNvPr id="38" name="Shape 36"/>
           <p:cNvSpPr/>
           <p:nvPr/>
         </p:nvSpPr>
@@ -2106,7 +2145,7 @@
       </p:sp>
       <p:sp>
         <p:nvSpPr>
-          <p:cNvPr id="38" name="Shape 36"/>
+          <p:cNvPr id="39" name="Shape 37"/>
           <p:cNvSpPr/>
           <p:nvPr/>
         </p:nvSpPr>
@@ -2131,7 +2170,7 @@
       </p:sp>
       <p:sp>
         <p:nvSpPr>
-          <p:cNvPr id="39" name="Shape 37"/>
+          <p:cNvPr id="40" name="Shape 38"/>
           <p:cNvSpPr/>
           <p:nvPr/>
         </p:nvSpPr>
@@ -2156,7 +2195,7 @@
       </p:sp>
       <p:sp>
         <p:nvSpPr>
-          <p:cNvPr id="40" name="Text 38"/>
+          <p:cNvPr id="41" name="Text 39"/>
           <p:cNvSpPr/>
           <p:nvPr/>
         </p:nvSpPr>
@@ -2195,7 +2234,7 @@
       </p:sp>
       <p:sp>
         <p:nvSpPr>
-          <p:cNvPr id="41" name="Text 39"/>
+          <p:cNvPr id="42" name="Text 40"/>
           <p:cNvSpPr/>
           <p:nvPr/>
         </p:nvSpPr>
@@ -2234,7 +2273,7 @@
       </p:sp>
       <p:sp>
         <p:nvSpPr>
-          <p:cNvPr id="42" name="Text 40"/>
+          <p:cNvPr id="43" name="Text 41"/>
           <p:cNvSpPr/>
           <p:nvPr/>
         </p:nvSpPr>
@@ -2273,7 +2312,7 @@
       </p:sp>
       <p:sp>
         <p:nvSpPr>
-          <p:cNvPr id="43" name="Shape 41"/>
+          <p:cNvPr id="44" name="Shape 42"/>
           <p:cNvSpPr/>
           <p:nvPr/>
         </p:nvSpPr>
@@ -2305,7 +2344,7 @@
       </p:sp>
       <p:sp>
         <p:nvSpPr>
-          <p:cNvPr id="44" name="Shape 42"/>
+          <p:cNvPr id="45" name="Shape 43"/>
           <p:cNvSpPr/>
           <p:nvPr/>
         </p:nvSpPr>
@@ -2330,7 +2369,7 @@
       </p:sp>
       <p:sp>
         <p:nvSpPr>
-          <p:cNvPr id="45" name="Shape 43"/>
+          <p:cNvPr id="46" name="Shape 44"/>
           <p:cNvSpPr/>
           <p:nvPr/>
         </p:nvSpPr>
@@ -2355,7 +2394,7 @@
       </p:sp>
       <p:sp>
         <p:nvSpPr>
-          <p:cNvPr id="46" name="Text 44"/>
+          <p:cNvPr id="47" name="Text 45"/>
           <p:cNvSpPr/>
           <p:nvPr/>
         </p:nvSpPr>
@@ -2394,7 +2433,7 @@
       </p:sp>
       <p:sp>
         <p:nvSpPr>
-          <p:cNvPr id="47" name="Text 45"/>
+          <p:cNvPr id="48" name="Text 46"/>
           <p:cNvSpPr/>
           <p:nvPr/>
         </p:nvSpPr>
@@ -2433,7 +2472,7 @@
       </p:sp>
       <p:sp>
         <p:nvSpPr>
-          <p:cNvPr id="48" name="Text 46"/>
+          <p:cNvPr id="49" name="Text 47"/>
           <p:cNvSpPr/>
           <p:nvPr/>
         </p:nvSpPr>
@@ -2472,7 +2511,7 @@
       </p:sp>
       <p:sp>
         <p:nvSpPr>
-          <p:cNvPr id="49" name="Text 47"/>
+          <p:cNvPr id="50" name="Text 48"/>
           <p:cNvSpPr/>
           <p:nvPr/>
         </p:nvSpPr>
@@ -2511,7 +2550,7 @@
       </p:sp>
       <p:sp>
         <p:nvSpPr>
-          <p:cNvPr id="50" name="Text 48"/>
+          <p:cNvPr id="51" name="Text 49"/>
           <p:cNvSpPr/>
           <p:nvPr/>
         </p:nvSpPr>
@@ -2550,7 +2589,7 @@
       </p:sp>
       <p:sp>
         <p:nvSpPr>
-          <p:cNvPr id="51" name="Shape 49"/>
+          <p:cNvPr id="52" name="Shape 50"/>
           <p:cNvSpPr/>
           <p:nvPr/>
         </p:nvSpPr>
@@ -2575,7 +2614,7 @@
       </p:sp>
       <p:sp>
         <p:nvSpPr>
-          <p:cNvPr id="52" name="Shape 50"/>
+          <p:cNvPr id="53" name="Shape 51"/>
           <p:cNvSpPr/>
           <p:nvPr/>
         </p:nvSpPr>
@@ -2600,7 +2639,7 @@
       </p:sp>
       <p:sp>
         <p:nvSpPr>
-          <p:cNvPr id="53" name="Text 51"/>
+          <p:cNvPr id="54" name="Text 52"/>
           <p:cNvSpPr/>
           <p:nvPr/>
         </p:nvSpPr>
@@ -2639,7 +2678,7 @@
       </p:sp>
       <p:sp>
         <p:nvSpPr>
-          <p:cNvPr id="54" name="Text 52"/>
+          <p:cNvPr id="55" name="Text 53"/>
           <p:cNvSpPr/>
           <p:nvPr/>
         </p:nvSpPr>
@@ -2678,7 +2717,7 @@
       </p:sp>
       <p:sp>
         <p:nvSpPr>
-          <p:cNvPr id="55" name="Text 53"/>
+          <p:cNvPr id="56" name="Text 54"/>
           <p:cNvSpPr/>
           <p:nvPr/>
         </p:nvSpPr>
@@ -2717,7 +2756,7 @@
       </p:sp>
       <p:sp>
         <p:nvSpPr>
-          <p:cNvPr id="56" name="Text 54"/>
+          <p:cNvPr id="57" name="Text 55"/>
           <p:cNvSpPr/>
           <p:nvPr/>
         </p:nvSpPr>
@@ -2756,7 +2795,7 @@
       </p:sp>
       <p:sp>
         <p:nvSpPr>
-          <p:cNvPr id="57" name="Shape 55"/>
+          <p:cNvPr id="58" name="Shape 56"/>
           <p:cNvSpPr/>
           <p:nvPr/>
         </p:nvSpPr>
@@ -2781,7 +2820,7 @@
       </p:sp>
       <p:sp>
         <p:nvSpPr>
-          <p:cNvPr id="58" name="Text 56"/>
+          <p:cNvPr id="59" name="Text 57"/>
           <p:cNvSpPr/>
           <p:nvPr/>
         </p:nvSpPr>
@@ -2820,7 +2859,7 @@
       </p:sp>
       <p:sp>
         <p:nvSpPr>
-          <p:cNvPr id="59" name="Shape 57"/>
+          <p:cNvPr id="60" name="Shape 58"/>
           <p:cNvSpPr/>
           <p:nvPr/>
         </p:nvSpPr>
@@ -2845,7 +2884,7 @@
       </p:sp>
       <p:sp>
         <p:nvSpPr>
-          <p:cNvPr id="60" name="Shape 58"/>
+          <p:cNvPr id="61" name="Shape 59"/>
           <p:cNvSpPr/>
           <p:nvPr/>
         </p:nvSpPr>

--- a/outputs/flyers/USMLE_Step2_Flyer.pptx
+++ b/outputs/flyers/USMLE_Step2_Flyer.pptx
@@ -884,7 +884,7 @@
         <p:spPr>
           <a:xfrm>
             <a:off x="0" y="0"/>
-            <a:ext cx="7772400" cy="1691640"/>
+            <a:ext cx="7772400" cy="1828800"/>
           </a:xfrm>
           <a:prstGeom prst="rect">
             <a:avLst/>
@@ -908,8 +908,8 @@
         </p:nvSpPr>
         <p:spPr>
           <a:xfrm>
-            <a:off x="457200" y="256032"/>
-            <a:ext cx="4457700" cy="201168"/>
+            <a:off x="457200" y="237744"/>
+            <a:ext cx="4457700" cy="219456"/>
           </a:xfrm>
           <a:prstGeom prst="rect">
             <a:avLst/>
@@ -925,7 +925,7 @@
               <a:buNone/>
             </a:pPr>
             <a:r>
-              <a:rPr lang="en-US" sz="1000" b="1" spc="400" kern="0" dirty="0">
+              <a:rPr lang="en-US" sz="1100" b="1" spc="400" kern="0" dirty="0">
                 <a:solidFill>
                   <a:srgbClr val="FFFFFF"/>
                 </a:solidFill>
@@ -935,7 +935,7 @@
               </a:rPr>
               <a:t>Enrolling now · July–October cohort</a:t>
             </a:r>
-            <a:endParaRPr lang="en-US" sz="1000" dirty="0"/>
+            <a:endParaRPr lang="en-US" sz="1100" dirty="0"/>
           </a:p>
         </p:txBody>
       </p:sp>
@@ -948,7 +948,7 @@
         <p:spPr>
           <a:xfrm>
             <a:off x="457200" y="457200"/>
-            <a:ext cx="4457700" cy="274320"/>
+            <a:ext cx="4457700" cy="292608"/>
           </a:xfrm>
           <a:prstGeom prst="rect">
             <a:avLst/>
@@ -964,7 +964,7 @@
               <a:buNone/>
             </a:pPr>
             <a:r>
-              <a:rPr lang="en-US" sz="2200" b="1" spc="800" kern="0" dirty="0">
+              <a:rPr lang="en-US" sz="2400" b="1" spc="800" kern="0" dirty="0">
                 <a:solidFill>
                   <a:srgbClr val="FFFFFF"/>
                 </a:solidFill>
@@ -974,7 +974,7 @@
               </a:rPr>
               <a:t>USMLE</a:t>
             </a:r>
-            <a:endParaRPr lang="en-US" sz="2200" dirty="0"/>
+            <a:endParaRPr lang="en-US" sz="2400" dirty="0"/>
           </a:p>
         </p:txBody>
       </p:sp>
@@ -986,8 +986,8 @@
         </p:nvSpPr>
         <p:spPr>
           <a:xfrm>
-            <a:off x="457200" y="749808"/>
-            <a:ext cx="4457700" cy="713232"/>
+            <a:off x="457200" y="768096"/>
+            <a:ext cx="4457700" cy="777240"/>
           </a:xfrm>
           <a:prstGeom prst="rect">
             <a:avLst/>
@@ -1003,7 +1003,7 @@
               <a:buNone/>
             </a:pPr>
             <a:r>
-              <a:rPr lang="en-US" sz="4800" b="1" dirty="0">
+              <a:rPr lang="en-US" sz="5400" b="1" dirty="0">
                 <a:solidFill>
                   <a:srgbClr val="FFFFFF"/>
                 </a:solidFill>
@@ -1013,7 +1013,7 @@
               </a:rPr>
               <a:t>Step 2 CK</a:t>
             </a:r>
-            <a:endParaRPr lang="en-US" sz="4800" dirty="0"/>
+            <a:endParaRPr lang="en-US" sz="5400" dirty="0"/>
           </a:p>
         </p:txBody>
       </p:sp>
@@ -1025,8 +1025,8 @@
         </p:nvSpPr>
         <p:spPr>
           <a:xfrm>
-            <a:off x="457200" y="1444752"/>
-            <a:ext cx="5829300" cy="219456"/>
+            <a:off x="457200" y="1517904"/>
+            <a:ext cx="5829300" cy="237744"/>
           </a:xfrm>
           <a:prstGeom prst="rect">
             <a:avLst/>
@@ -1042,7 +1042,7 @@
               <a:buNone/>
             </a:pPr>
             <a:r>
-              <a:rPr lang="en-US" sz="1200" i="1" dirty="0">
+              <a:rPr lang="en-US" sz="1300" i="1" dirty="0">
                 <a:solidFill>
                   <a:srgbClr val="FFFFFF"/>
                 </a:solidFill>
@@ -1052,7 +1052,7 @@
               </a:rPr>
               <a:t>Sharpen clinical reasoning. Move from facts to bedside decisions.</a:t>
             </a:r>
-            <a:endParaRPr lang="en-US" sz="1200" dirty="0"/>
+            <a:endParaRPr lang="en-US" sz="1300" dirty="0"/>
           </a:p>
         </p:txBody>
       </p:sp>
@@ -1064,8 +1064,8 @@
         </p:nvSpPr>
         <p:spPr>
           <a:xfrm>
-            <a:off x="5623560" y="457200"/>
-            <a:ext cx="1691640" cy="868680"/>
+            <a:off x="5486400" y="457200"/>
+            <a:ext cx="1828800" cy="960120"/>
           </a:xfrm>
           <a:prstGeom prst="rect">
             <a:avLst/>
@@ -1089,8 +1089,8 @@
         </p:nvSpPr>
         <p:spPr>
           <a:xfrm>
-            <a:off x="5623560" y="502920"/>
-            <a:ext cx="1691640" cy="274320"/>
+            <a:off x="5486400" y="502920"/>
+            <a:ext cx="1828800" cy="292608"/>
           </a:xfrm>
           <a:prstGeom prst="rect">
             <a:avLst/>
@@ -1106,7 +1106,7 @@
               <a:buNone/>
             </a:pPr>
             <a:r>
-              <a:rPr lang="en-US" sz="1100" b="1" spc="400" kern="0" dirty="0">
+              <a:rPr lang="en-US" sz="1200" b="1" spc="400" kern="0" dirty="0">
                 <a:solidFill>
                   <a:srgbClr val="FFFFFF"/>
                 </a:solidFill>
@@ -1116,7 +1116,7 @@
               </a:rPr>
               <a:t>MON–SUN</a:t>
             </a:r>
-            <a:endParaRPr lang="en-US" sz="1100" dirty="0"/>
+            <a:endParaRPr lang="en-US" sz="1200" dirty="0"/>
           </a:p>
         </p:txBody>
       </p:sp>
@@ -1128,8 +1128,8 @@
         </p:nvSpPr>
         <p:spPr>
           <a:xfrm>
-            <a:off x="5623560" y="777240"/>
-            <a:ext cx="1691640" cy="256032"/>
+            <a:off x="5486400" y="804672"/>
+            <a:ext cx="1828800" cy="292608"/>
           </a:xfrm>
           <a:prstGeom prst="rect">
             <a:avLst/>
@@ -1145,7 +1145,7 @@
               <a:buNone/>
             </a:pPr>
             <a:r>
-              <a:rPr lang="en-US" sz="1200" b="1" dirty="0">
+              <a:rPr lang="en-US" sz="1400" b="1" dirty="0">
                 <a:solidFill>
                   <a:srgbClr val="FFFFFF"/>
                 </a:solidFill>
@@ -1155,7 +1155,7 @@
               </a:rPr>
               <a:t>4-month prep</a:t>
             </a:r>
-            <a:endParaRPr lang="en-US" sz="1200" dirty="0"/>
+            <a:endParaRPr lang="en-US" sz="1400" dirty="0"/>
           </a:p>
         </p:txBody>
       </p:sp>
@@ -1167,8 +1167,8 @@
         </p:nvSpPr>
         <p:spPr>
           <a:xfrm>
-            <a:off x="5623560" y="1033272"/>
-            <a:ext cx="1691640" cy="237744"/>
+            <a:off x="5486400" y="1097280"/>
+            <a:ext cx="1828800" cy="274320"/>
           </a:xfrm>
           <a:prstGeom prst="rect">
             <a:avLst/>
@@ -1184,7 +1184,7 @@
               <a:buNone/>
             </a:pPr>
             <a:r>
-              <a:rPr lang="en-US" sz="900" i="1" dirty="0">
+              <a:rPr lang="en-US" sz="1050" i="1" dirty="0">
                 <a:solidFill>
                   <a:srgbClr val="FFFFFF"/>
                 </a:solidFill>
@@ -1194,7 +1194,7 @@
               </a:rPr>
               <a:t>· daily classes ·</a:t>
             </a:r>
-            <a:endParaRPr lang="en-US" sz="900" dirty="0"/>
+            <a:endParaRPr lang="en-US" sz="1050" dirty="0"/>
           </a:p>
         </p:txBody>
       </p:sp>
@@ -1206,8 +1206,8 @@
         </p:nvSpPr>
         <p:spPr>
           <a:xfrm>
-            <a:off x="457200" y="1874520"/>
-            <a:ext cx="6858000" cy="868680"/>
+            <a:off x="457200" y="1965960"/>
+            <a:ext cx="6858000" cy="1005840"/>
           </a:xfrm>
           <a:prstGeom prst="rect">
             <a:avLst/>
@@ -1231,8 +1231,8 @@
         </p:nvSpPr>
         <p:spPr>
           <a:xfrm>
-            <a:off x="621792" y="1993392"/>
-            <a:ext cx="640080" cy="640080"/>
+            <a:off x="640080" y="2130552"/>
+            <a:ext cx="713232" cy="713232"/>
           </a:xfrm>
           <a:prstGeom prst="ellipse">
             <a:avLst/>
@@ -1256,8 +1256,8 @@
         </p:nvSpPr>
         <p:spPr>
           <a:xfrm>
-            <a:off x="621792" y="1993392"/>
-            <a:ext cx="640080" cy="640080"/>
+            <a:off x="640080" y="2130552"/>
+            <a:ext cx="713232" cy="713232"/>
           </a:xfrm>
           <a:prstGeom prst="rect">
             <a:avLst/>
@@ -1273,7 +1273,7 @@
               <a:buNone/>
             </a:pPr>
             <a:r>
-              <a:rPr lang="en-US" sz="2200" b="1" dirty="0">
+              <a:rPr lang="en-US" sz="2400" b="1" dirty="0">
                 <a:solidFill>
                   <a:srgbClr val="FFFFFF"/>
                 </a:solidFill>
@@ -1283,7 +1283,7 @@
               </a:rPr>
               <a:t>AB</a:t>
             </a:r>
-            <a:endParaRPr lang="en-US" sz="2200" dirty="0"/>
+            <a:endParaRPr lang="en-US" sz="2400" dirty="0"/>
           </a:p>
         </p:txBody>
       </p:sp>
@@ -1295,8 +1295,8 @@
         </p:nvSpPr>
         <p:spPr>
           <a:xfrm>
-            <a:off x="1417320" y="1947672"/>
-            <a:ext cx="5852160" cy="292608"/>
+            <a:off x="1508760" y="2057400"/>
+            <a:ext cx="5760720" cy="329184"/>
           </a:xfrm>
           <a:prstGeom prst="rect">
             <a:avLst/>
@@ -1312,7 +1312,7 @@
               <a:buNone/>
             </a:pPr>
             <a:r>
-              <a:rPr lang="en-US" sz="1600" b="1" dirty="0">
+              <a:rPr lang="en-US" sz="1800" b="1" dirty="0">
                 <a:solidFill>
                   <a:srgbClr val="0C2A3D"/>
                 </a:solidFill>
@@ -1322,7 +1322,7 @@
               </a:rPr>
               <a:t>Allan Bakesiga, MD</a:t>
             </a:r>
-            <a:endParaRPr lang="en-US" sz="1600" dirty="0"/>
+            <a:endParaRPr lang="en-US" sz="1800" dirty="0"/>
           </a:p>
         </p:txBody>
       </p:sp>
@@ -1334,8 +1334,8 @@
         </p:nvSpPr>
         <p:spPr>
           <a:xfrm>
-            <a:off x="1417320" y="2240280"/>
-            <a:ext cx="5852160" cy="237744"/>
+            <a:off x="1508760" y="2386584"/>
+            <a:ext cx="5760720" cy="274320"/>
           </a:xfrm>
           <a:prstGeom prst="rect">
             <a:avLst/>
@@ -1351,7 +1351,7 @@
               <a:buNone/>
             </a:pPr>
             <a:r>
-              <a:rPr lang="en-US" sz="1050" dirty="0">
+              <a:rPr lang="en-US" sz="1200" dirty="0">
                 <a:solidFill>
                   <a:srgbClr val="345671"/>
                 </a:solidFill>
@@ -1361,7 +1361,7 @@
               </a:rPr>
               <a:t>MD (Makerere)  ·  MScGH (Duke)  ·  Incoming PGY-1 Neurology, Creighton</a:t>
             </a:r>
-            <a:endParaRPr lang="en-US" sz="1050" dirty="0"/>
+            <a:endParaRPr lang="en-US" sz="1200" dirty="0"/>
           </a:p>
         </p:txBody>
       </p:sp>
@@ -1373,8 +1373,8 @@
         </p:nvSpPr>
         <p:spPr>
           <a:xfrm>
-            <a:off x="1417320" y="2459736"/>
-            <a:ext cx="5852160" cy="219456"/>
+            <a:off x="1508760" y="2660904"/>
+            <a:ext cx="5760720" cy="256032"/>
           </a:xfrm>
           <a:prstGeom prst="rect">
             <a:avLst/>
@@ -1390,7 +1390,7 @@
               <a:buNone/>
             </a:pPr>
             <a:r>
-              <a:rPr lang="en-US" sz="1000" i="1" dirty="0">
+              <a:rPr lang="en-US" sz="1100" i="1" dirty="0">
                 <a:solidFill>
                   <a:srgbClr val="B45309"/>
                 </a:solidFill>
@@ -1400,7 +1400,7 @@
               </a:rPr>
               <a:t>Epidemiology &amp; biostatistics teaching assistant</a:t>
             </a:r>
-            <a:endParaRPr lang="en-US" sz="1000" dirty="0"/>
+            <a:endParaRPr lang="en-US" sz="1100" dirty="0"/>
           </a:p>
         </p:txBody>
       </p:sp>
@@ -1412,8 +1412,8 @@
         </p:nvSpPr>
         <p:spPr>
           <a:xfrm>
-            <a:off x="457200" y="2926080"/>
-            <a:ext cx="2164080" cy="868680"/>
+            <a:off x="457200" y="3108960"/>
+            <a:ext cx="2164080" cy="960120"/>
           </a:xfrm>
           <a:prstGeom prst="rect">
             <a:avLst/>
@@ -1437,8 +1437,8 @@
         </p:nvSpPr>
         <p:spPr>
           <a:xfrm>
-            <a:off x="457200" y="3017520"/>
-            <a:ext cx="2164080" cy="411480"/>
+            <a:off x="457200" y="3218688"/>
+            <a:ext cx="2164080" cy="457200"/>
           </a:xfrm>
           <a:prstGeom prst="rect">
             <a:avLst/>
@@ -1454,7 +1454,7 @@
               <a:buNone/>
             </a:pPr>
             <a:r>
-              <a:rPr lang="en-US" sz="2200" b="1" dirty="0">
+              <a:rPr lang="en-US" sz="2600" b="1" dirty="0">
                 <a:solidFill>
                   <a:srgbClr val="B45309"/>
                 </a:solidFill>
@@ -1464,7 +1464,7 @@
               </a:rPr>
               <a:t>Mon–Sun</a:t>
             </a:r>
-            <a:endParaRPr lang="en-US" sz="2200" dirty="0"/>
+            <a:endParaRPr lang="en-US" sz="2600" dirty="0"/>
           </a:p>
         </p:txBody>
       </p:sp>
@@ -1476,8 +1476,8 @@
         </p:nvSpPr>
         <p:spPr>
           <a:xfrm>
-            <a:off x="457200" y="3429000"/>
-            <a:ext cx="2164080" cy="292608"/>
+            <a:off x="457200" y="3675888"/>
+            <a:ext cx="2164080" cy="320040"/>
           </a:xfrm>
           <a:prstGeom prst="rect">
             <a:avLst/>
@@ -1493,7 +1493,7 @@
               <a:buNone/>
             </a:pPr>
             <a:r>
-              <a:rPr lang="en-US" sz="1000" b="1" spc="200" kern="0" dirty="0">
+              <a:rPr lang="en-US" sz="1100" b="1" spc="200" kern="0" dirty="0">
                 <a:solidFill>
                   <a:srgbClr val="345671"/>
                 </a:solidFill>
@@ -1503,7 +1503,7 @@
               </a:rPr>
               <a:t>Daily classes</a:t>
             </a:r>
-            <a:endParaRPr lang="en-US" sz="1000" dirty="0"/>
+            <a:endParaRPr lang="en-US" sz="1100" dirty="0"/>
           </a:p>
         </p:txBody>
       </p:sp>
@@ -1515,8 +1515,8 @@
         </p:nvSpPr>
         <p:spPr>
           <a:xfrm>
-            <a:off x="2804160" y="2926080"/>
-            <a:ext cx="2164080" cy="868680"/>
+            <a:off x="2804160" y="3108960"/>
+            <a:ext cx="2164080" cy="960120"/>
           </a:xfrm>
           <a:prstGeom prst="rect">
             <a:avLst/>
@@ -1540,8 +1540,8 @@
         </p:nvSpPr>
         <p:spPr>
           <a:xfrm>
-            <a:off x="2804160" y="3017520"/>
-            <a:ext cx="2164080" cy="411480"/>
+            <a:off x="2804160" y="3218688"/>
+            <a:ext cx="2164080" cy="457200"/>
           </a:xfrm>
           <a:prstGeom prst="rect">
             <a:avLst/>
@@ -1557,7 +1557,7 @@
               <a:buNone/>
             </a:pPr>
             <a:r>
-              <a:rPr lang="en-US" sz="2200" b="1" dirty="0">
+              <a:rPr lang="en-US" sz="2600" b="1" dirty="0">
                 <a:solidFill>
                   <a:srgbClr val="B45309"/>
                 </a:solidFill>
@@ -1567,7 +1567,7 @@
               </a:rPr>
               <a:t>4 mo</a:t>
             </a:r>
-            <a:endParaRPr lang="en-US" sz="2200" dirty="0"/>
+            <a:endParaRPr lang="en-US" sz="2600" dirty="0"/>
           </a:p>
         </p:txBody>
       </p:sp>
@@ -1579,8 +1579,8 @@
         </p:nvSpPr>
         <p:spPr>
           <a:xfrm>
-            <a:off x="2804160" y="3429000"/>
-            <a:ext cx="2164080" cy="292608"/>
+            <a:off x="2804160" y="3675888"/>
+            <a:ext cx="2164080" cy="320040"/>
           </a:xfrm>
           <a:prstGeom prst="rect">
             <a:avLst/>
@@ -1596,7 +1596,7 @@
               <a:buNone/>
             </a:pPr>
             <a:r>
-              <a:rPr lang="en-US" sz="1000" b="1" spc="200" kern="0" dirty="0">
+              <a:rPr lang="en-US" sz="1100" b="1" spc="200" kern="0" dirty="0">
                 <a:solidFill>
                   <a:srgbClr val="345671"/>
                 </a:solidFill>
@@ -1606,7 +1606,7 @@
               </a:rPr>
               <a:t>Structured roadmap</a:t>
             </a:r>
-            <a:endParaRPr lang="en-US" sz="1000" dirty="0"/>
+            <a:endParaRPr lang="en-US" sz="1100" dirty="0"/>
           </a:p>
         </p:txBody>
       </p:sp>
@@ -1618,8 +1618,8 @@
         </p:nvSpPr>
         <p:spPr>
           <a:xfrm>
-            <a:off x="5151120" y="2926080"/>
-            <a:ext cx="2164080" cy="868680"/>
+            <a:off x="5151120" y="3108960"/>
+            <a:ext cx="2164080" cy="960120"/>
           </a:xfrm>
           <a:prstGeom prst="rect">
             <a:avLst/>
@@ -1643,8 +1643,8 @@
         </p:nvSpPr>
         <p:spPr>
           <a:xfrm>
-            <a:off x="5151120" y="3017520"/>
-            <a:ext cx="2164080" cy="411480"/>
+            <a:off x="5151120" y="3218688"/>
+            <a:ext cx="2164080" cy="457200"/>
           </a:xfrm>
           <a:prstGeom prst="rect">
             <a:avLst/>
@@ -1660,7 +1660,7 @@
               <a:buNone/>
             </a:pPr>
             <a:r>
-              <a:rPr lang="en-US" sz="2200" b="1" dirty="0">
+              <a:rPr lang="en-US" sz="2600" b="1" dirty="0">
                 <a:solidFill>
                   <a:srgbClr val="B45309"/>
                 </a:solidFill>
@@ -1670,7 +1670,7 @@
               </a:rPr>
               <a:t>Step 1+2</a:t>
             </a:r>
-            <a:endParaRPr lang="en-US" sz="2200" dirty="0"/>
+            <a:endParaRPr lang="en-US" sz="2600" dirty="0"/>
           </a:p>
         </p:txBody>
       </p:sp>
@@ -1682,8 +1682,8 @@
         </p:nvSpPr>
         <p:spPr>
           <a:xfrm>
-            <a:off x="5151120" y="3429000"/>
-            <a:ext cx="2164080" cy="292608"/>
+            <a:off x="5151120" y="3675888"/>
+            <a:ext cx="2164080" cy="320040"/>
           </a:xfrm>
           <a:prstGeom prst="rect">
             <a:avLst/>
@@ -1699,7 +1699,7 @@
               <a:buNone/>
             </a:pPr>
             <a:r>
-              <a:rPr lang="en-US" sz="1000" b="1" spc="200" kern="0" dirty="0">
+              <a:rPr lang="en-US" sz="1100" b="1" spc="200" kern="0" dirty="0">
                 <a:solidFill>
                   <a:srgbClr val="345671"/>
                 </a:solidFill>
@@ -1709,7 +1709,7 @@
               </a:rPr>
               <a:t>Combined option</a:t>
             </a:r>
-            <a:endParaRPr lang="en-US" sz="1000" dirty="0"/>
+            <a:endParaRPr lang="en-US" sz="1100" dirty="0"/>
           </a:p>
         </p:txBody>
       </p:sp>
@@ -1721,8 +1721,8 @@
         </p:nvSpPr>
         <p:spPr>
           <a:xfrm>
-            <a:off x="457200" y="4023360"/>
-            <a:ext cx="3314700" cy="1005840"/>
+            <a:off x="457200" y="4160520"/>
+            <a:ext cx="3314700" cy="1097280"/>
           </a:xfrm>
           <a:prstGeom prst="rect">
             <a:avLst/>
@@ -1753,8 +1753,8 @@
         </p:nvSpPr>
         <p:spPr>
           <a:xfrm>
-            <a:off x="457200" y="4023360"/>
-            <a:ext cx="91440" cy="1005840"/>
+            <a:off x="457200" y="4160520"/>
+            <a:ext cx="91440" cy="1097280"/>
           </a:xfrm>
           <a:prstGeom prst="rect">
             <a:avLst/>
@@ -1778,8 +1778,8 @@
         </p:nvSpPr>
         <p:spPr>
           <a:xfrm>
-            <a:off x="685800" y="4206240"/>
-            <a:ext cx="384048" cy="384048"/>
+            <a:off x="685800" y="4361688"/>
+            <a:ext cx="438912" cy="438912"/>
           </a:xfrm>
           <a:prstGeom prst="ellipse">
             <a:avLst/>
@@ -1803,8 +1803,8 @@
         </p:nvSpPr>
         <p:spPr>
           <a:xfrm>
-            <a:off x="685800" y="4206240"/>
-            <a:ext cx="384048" cy="384048"/>
+            <a:off x="685800" y="4361688"/>
+            <a:ext cx="438912" cy="438912"/>
           </a:xfrm>
           <a:prstGeom prst="rect">
             <a:avLst/>
@@ -1820,7 +1820,7 @@
               <a:buNone/>
             </a:pPr>
             <a:r>
-              <a:rPr lang="en-US" sz="1600" b="1" dirty="0">
+              <a:rPr lang="en-US" sz="1800" b="1" dirty="0">
                 <a:solidFill>
                   <a:srgbClr val="FFFFFF"/>
                 </a:solidFill>
@@ -1830,7 +1830,7 @@
               </a:rPr>
               <a:t>1</a:t>
             </a:r>
-            <a:endParaRPr lang="en-US" sz="1600" dirty="0"/>
+            <a:endParaRPr lang="en-US" sz="1800" dirty="0"/>
           </a:p>
         </p:txBody>
       </p:sp>
@@ -1842,8 +1842,8 @@
         </p:nvSpPr>
         <p:spPr>
           <a:xfrm>
-            <a:off x="1143000" y="4187952"/>
-            <a:ext cx="2537460" cy="274320"/>
+            <a:off x="1207008" y="4325112"/>
+            <a:ext cx="2473452" cy="310896"/>
           </a:xfrm>
           <a:prstGeom prst="rect">
             <a:avLst/>
@@ -1859,7 +1859,7 @@
               <a:buNone/>
             </a:pPr>
             <a:r>
-              <a:rPr lang="en-US" sz="1300" b="1" dirty="0">
+              <a:rPr lang="en-US" sz="1500" b="1" dirty="0">
                 <a:solidFill>
                   <a:srgbClr val="0C2A3D"/>
                 </a:solidFill>
@@ -1869,7 +1869,7 @@
               </a:rPr>
               <a:t>Daily classes</a:t>
             </a:r>
-            <a:endParaRPr lang="en-US" sz="1300" dirty="0"/>
+            <a:endParaRPr lang="en-US" sz="1500" dirty="0"/>
           </a:p>
         </p:txBody>
       </p:sp>
@@ -1881,8 +1881,8 @@
         </p:nvSpPr>
         <p:spPr>
           <a:xfrm>
-            <a:off x="1143000" y="4480560"/>
-            <a:ext cx="2537460" cy="502920"/>
+            <a:off x="1207008" y="4654296"/>
+            <a:ext cx="2473452" cy="548640"/>
           </a:xfrm>
           <a:prstGeom prst="rect">
             <a:avLst/>
@@ -1898,7 +1898,7 @@
               <a:buNone/>
             </a:pPr>
             <a:r>
-              <a:rPr lang="en-US" sz="1000" dirty="0">
+              <a:rPr lang="en-US" sz="1150" dirty="0">
                 <a:solidFill>
                   <a:srgbClr val="345671"/>
                 </a:solidFill>
@@ -1908,7 +1908,7 @@
               </a:rPr>
               <a:t>Monday to Sunday. Topic-by-topic flow that keeps you in the material every single day.</a:t>
             </a:r>
-            <a:endParaRPr lang="en-US" sz="1000" dirty="0"/>
+            <a:endParaRPr lang="en-US" sz="1150" dirty="0"/>
           </a:p>
         </p:txBody>
       </p:sp>
@@ -1920,8 +1920,8 @@
         </p:nvSpPr>
         <p:spPr>
           <a:xfrm>
-            <a:off x="4000500" y="4023360"/>
-            <a:ext cx="3314700" cy="1005840"/>
+            <a:off x="4000500" y="4160520"/>
+            <a:ext cx="3314700" cy="1097280"/>
           </a:xfrm>
           <a:prstGeom prst="rect">
             <a:avLst/>
@@ -1952,8 +1952,8 @@
         </p:nvSpPr>
         <p:spPr>
           <a:xfrm>
-            <a:off x="4000500" y="4023360"/>
-            <a:ext cx="91440" cy="1005840"/>
+            <a:off x="4000500" y="4160520"/>
+            <a:ext cx="91440" cy="1097280"/>
           </a:xfrm>
           <a:prstGeom prst="rect">
             <a:avLst/>
@@ -1977,8 +1977,8 @@
         </p:nvSpPr>
         <p:spPr>
           <a:xfrm>
-            <a:off x="4229100" y="4206240"/>
-            <a:ext cx="384048" cy="384048"/>
+            <a:off x="4229100" y="4361688"/>
+            <a:ext cx="438912" cy="438912"/>
           </a:xfrm>
           <a:prstGeom prst="ellipse">
             <a:avLst/>
@@ -2002,8 +2002,8 @@
         </p:nvSpPr>
         <p:spPr>
           <a:xfrm>
-            <a:off x="4229100" y="4206240"/>
-            <a:ext cx="384048" cy="384048"/>
+            <a:off x="4229100" y="4361688"/>
+            <a:ext cx="438912" cy="438912"/>
           </a:xfrm>
           <a:prstGeom prst="rect">
             <a:avLst/>
@@ -2019,7 +2019,7 @@
               <a:buNone/>
             </a:pPr>
             <a:r>
-              <a:rPr lang="en-US" sz="1600" b="1" dirty="0">
+              <a:rPr lang="en-US" sz="1800" b="1" dirty="0">
                 <a:solidFill>
                   <a:srgbClr val="FFFFFF"/>
                 </a:solidFill>
@@ -2029,7 +2029,7 @@
               </a:rPr>
               <a:t>2</a:t>
             </a:r>
-            <a:endParaRPr lang="en-US" sz="1600" dirty="0"/>
+            <a:endParaRPr lang="en-US" sz="1800" dirty="0"/>
           </a:p>
         </p:txBody>
       </p:sp>
@@ -2041,8 +2041,8 @@
         </p:nvSpPr>
         <p:spPr>
           <a:xfrm>
-            <a:off x="4686300" y="4187952"/>
-            <a:ext cx="2537460" cy="274320"/>
+            <a:off x="4750308" y="4325112"/>
+            <a:ext cx="2473452" cy="310896"/>
           </a:xfrm>
           <a:prstGeom prst="rect">
             <a:avLst/>
@@ -2058,7 +2058,7 @@
               <a:buNone/>
             </a:pPr>
             <a:r>
-              <a:rPr lang="en-US" sz="1300" b="1" dirty="0">
+              <a:rPr lang="en-US" sz="1500" b="1" dirty="0">
                 <a:solidFill>
                   <a:srgbClr val="0C2A3D"/>
                 </a:solidFill>
@@ -2068,7 +2068,7 @@
               </a:rPr>
               <a:t>Active community</a:t>
             </a:r>
-            <a:endParaRPr lang="en-US" sz="1300" dirty="0"/>
+            <a:endParaRPr lang="en-US" sz="1500" dirty="0"/>
           </a:p>
         </p:txBody>
       </p:sp>
@@ -2080,8 +2080,8 @@
         </p:nvSpPr>
         <p:spPr>
           <a:xfrm>
-            <a:off x="4686300" y="4480560"/>
-            <a:ext cx="2537460" cy="502920"/>
+            <a:off x="4750308" y="4654296"/>
+            <a:ext cx="2473452" cy="548640"/>
           </a:xfrm>
           <a:prstGeom prst="rect">
             <a:avLst/>
@@ -2097,7 +2097,7 @@
               <a:buNone/>
             </a:pPr>
             <a:r>
-              <a:rPr lang="en-US" sz="1000" dirty="0">
+              <a:rPr lang="en-US" sz="1150" dirty="0">
                 <a:solidFill>
                   <a:srgbClr val="345671"/>
                 </a:solidFill>
@@ -2107,7 +2107,7 @@
               </a:rPr>
               <a:t>Off-class peer discussions, accountability, and rapid Q&amp;A between sessions.</a:t>
             </a:r>
-            <a:endParaRPr lang="en-US" sz="1000" dirty="0"/>
+            <a:endParaRPr lang="en-US" sz="1150" dirty="0"/>
           </a:p>
         </p:txBody>
       </p:sp>
@@ -2119,8 +2119,8 @@
         </p:nvSpPr>
         <p:spPr>
           <a:xfrm>
-            <a:off x="457200" y="5193792"/>
-            <a:ext cx="3314700" cy="1005840"/>
+            <a:off x="457200" y="5422392"/>
+            <a:ext cx="3314700" cy="1097280"/>
           </a:xfrm>
           <a:prstGeom prst="rect">
             <a:avLst/>
@@ -2151,8 +2151,8 @@
         </p:nvSpPr>
         <p:spPr>
           <a:xfrm>
-            <a:off x="457200" y="5193792"/>
-            <a:ext cx="91440" cy="1005840"/>
+            <a:off x="457200" y="5422392"/>
+            <a:ext cx="91440" cy="1097280"/>
           </a:xfrm>
           <a:prstGeom prst="rect">
             <a:avLst/>
@@ -2176,8 +2176,8 @@
         </p:nvSpPr>
         <p:spPr>
           <a:xfrm>
-            <a:off x="685800" y="5376672"/>
-            <a:ext cx="384048" cy="384048"/>
+            <a:off x="685800" y="5623560"/>
+            <a:ext cx="438912" cy="438912"/>
           </a:xfrm>
           <a:prstGeom prst="ellipse">
             <a:avLst/>
@@ -2201,8 +2201,8 @@
         </p:nvSpPr>
         <p:spPr>
           <a:xfrm>
-            <a:off x="685800" y="5376672"/>
-            <a:ext cx="384048" cy="384048"/>
+            <a:off x="685800" y="5623560"/>
+            <a:ext cx="438912" cy="438912"/>
           </a:xfrm>
           <a:prstGeom prst="rect">
             <a:avLst/>
@@ -2218,7 +2218,7 @@
               <a:buNone/>
             </a:pPr>
             <a:r>
-              <a:rPr lang="en-US" sz="1600" b="1" dirty="0">
+              <a:rPr lang="en-US" sz="1800" b="1" dirty="0">
                 <a:solidFill>
                   <a:srgbClr val="FFFFFF"/>
                 </a:solidFill>
@@ -2228,7 +2228,7 @@
               </a:rPr>
               <a:t>3</a:t>
             </a:r>
-            <a:endParaRPr lang="en-US" sz="1600" dirty="0"/>
+            <a:endParaRPr lang="en-US" sz="1800" dirty="0"/>
           </a:p>
         </p:txBody>
       </p:sp>
@@ -2240,8 +2240,8 @@
         </p:nvSpPr>
         <p:spPr>
           <a:xfrm>
-            <a:off x="1143000" y="5358384"/>
-            <a:ext cx="2537460" cy="274320"/>
+            <a:off x="1207008" y="5586984"/>
+            <a:ext cx="2473452" cy="310896"/>
           </a:xfrm>
           <a:prstGeom prst="rect">
             <a:avLst/>
@@ -2257,7 +2257,7 @@
               <a:buNone/>
             </a:pPr>
             <a:r>
-              <a:rPr lang="en-US" sz="1300" b="1" dirty="0">
+              <a:rPr lang="en-US" sz="1500" b="1" dirty="0">
                 <a:solidFill>
                   <a:srgbClr val="0C2A3D"/>
                 </a:solidFill>
@@ -2267,7 +2267,7 @@
               </a:rPr>
               <a:t>Textbook + Qbank</a:t>
             </a:r>
-            <a:endParaRPr lang="en-US" sz="1300" dirty="0"/>
+            <a:endParaRPr lang="en-US" sz="1500" dirty="0"/>
           </a:p>
         </p:txBody>
       </p:sp>
@@ -2279,8 +2279,8 @@
         </p:nvSpPr>
         <p:spPr>
           <a:xfrm>
-            <a:off x="1143000" y="5650992"/>
-            <a:ext cx="2537460" cy="502920"/>
+            <a:off x="1207008" y="5916168"/>
+            <a:ext cx="2473452" cy="548640"/>
           </a:xfrm>
           <a:prstGeom prst="rect">
             <a:avLst/>
@@ -2296,7 +2296,7 @@
               <a:buNone/>
             </a:pPr>
             <a:r>
-              <a:rPr lang="en-US" sz="1000" dirty="0">
+              <a:rPr lang="en-US" sz="1150" dirty="0">
                 <a:solidFill>
                   <a:srgbClr val="345671"/>
                 </a:solidFill>
@@ -2306,7 +2306,7 @@
               </a:rPr>
               <a:t>Full review of the recommended textbook plus USMLE-style questions from the recommended Qbank.</a:t>
             </a:r>
-            <a:endParaRPr lang="en-US" sz="1000" dirty="0"/>
+            <a:endParaRPr lang="en-US" sz="1150" dirty="0"/>
           </a:p>
         </p:txBody>
       </p:sp>
@@ -2318,8 +2318,8 @@
         </p:nvSpPr>
         <p:spPr>
           <a:xfrm>
-            <a:off x="4000500" y="5193792"/>
-            <a:ext cx="3314700" cy="1005840"/>
+            <a:off x="4000500" y="5422392"/>
+            <a:ext cx="3314700" cy="1097280"/>
           </a:xfrm>
           <a:prstGeom prst="rect">
             <a:avLst/>
@@ -2350,8 +2350,8 @@
         </p:nvSpPr>
         <p:spPr>
           <a:xfrm>
-            <a:off x="4000500" y="5193792"/>
-            <a:ext cx="91440" cy="1005840"/>
+            <a:off x="4000500" y="5422392"/>
+            <a:ext cx="91440" cy="1097280"/>
           </a:xfrm>
           <a:prstGeom prst="rect">
             <a:avLst/>
@@ -2375,8 +2375,8 @@
         </p:nvSpPr>
         <p:spPr>
           <a:xfrm>
-            <a:off x="4229100" y="5376672"/>
-            <a:ext cx="384048" cy="384048"/>
+            <a:off x="4229100" y="5623560"/>
+            <a:ext cx="438912" cy="438912"/>
           </a:xfrm>
           <a:prstGeom prst="ellipse">
             <a:avLst/>
@@ -2400,8 +2400,8 @@
         </p:nvSpPr>
         <p:spPr>
           <a:xfrm>
-            <a:off x="4229100" y="5376672"/>
-            <a:ext cx="384048" cy="384048"/>
+            <a:off x="4229100" y="5623560"/>
+            <a:ext cx="438912" cy="438912"/>
           </a:xfrm>
           <a:prstGeom prst="rect">
             <a:avLst/>
@@ -2417,7 +2417,7 @@
               <a:buNone/>
             </a:pPr>
             <a:r>
-              <a:rPr lang="en-US" sz="1600" b="1" dirty="0">
+              <a:rPr lang="en-US" sz="1800" b="1" dirty="0">
                 <a:solidFill>
                   <a:srgbClr val="FFFFFF"/>
                 </a:solidFill>
@@ -2427,7 +2427,7 @@
               </a:rPr>
               <a:t>4</a:t>
             </a:r>
-            <a:endParaRPr lang="en-US" sz="1600" dirty="0"/>
+            <a:endParaRPr lang="en-US" sz="1800" dirty="0"/>
           </a:p>
         </p:txBody>
       </p:sp>
@@ -2439,8 +2439,8 @@
         </p:nvSpPr>
         <p:spPr>
           <a:xfrm>
-            <a:off x="4686300" y="5358384"/>
-            <a:ext cx="2537460" cy="274320"/>
+            <a:off x="4750308" y="5586984"/>
+            <a:ext cx="2473452" cy="310896"/>
           </a:xfrm>
           <a:prstGeom prst="rect">
             <a:avLst/>
@@ -2456,7 +2456,7 @@
               <a:buNone/>
             </a:pPr>
             <a:r>
-              <a:rPr lang="en-US" sz="1300" b="1" dirty="0">
+              <a:rPr lang="en-US" sz="1500" b="1" dirty="0">
                 <a:solidFill>
                   <a:srgbClr val="0C2A3D"/>
                 </a:solidFill>
@@ -2466,7 +2466,7 @@
               </a:rPr>
               <a:t>End-to-end mentorship</a:t>
             </a:r>
-            <a:endParaRPr lang="en-US" sz="1300" dirty="0"/>
+            <a:endParaRPr lang="en-US" sz="1500" dirty="0"/>
           </a:p>
         </p:txBody>
       </p:sp>
@@ -2478,8 +2478,8 @@
         </p:nvSpPr>
         <p:spPr>
           <a:xfrm>
-            <a:off x="4686300" y="5650992"/>
-            <a:ext cx="2537460" cy="502920"/>
+            <a:off x="4750308" y="5916168"/>
+            <a:ext cx="2473452" cy="548640"/>
           </a:xfrm>
           <a:prstGeom prst="rect">
             <a:avLst/>
@@ -2495,7 +2495,7 @@
               <a:buNone/>
             </a:pPr>
             <a:r>
-              <a:rPr lang="en-US" sz="1000" dirty="0">
+              <a:rPr lang="en-US" sz="1150" dirty="0">
                 <a:solidFill>
                   <a:srgbClr val="345671"/>
                 </a:solidFill>
@@ -2505,7 +2505,7 @@
               </a:rPr>
               <a:t>Guidance through ECFMG, CV, personal statement, interview prep, and residency application.</a:t>
             </a:r>
-            <a:endParaRPr lang="en-US" sz="1000" dirty="0"/>
+            <a:endParaRPr lang="en-US" sz="1150" dirty="0"/>
           </a:p>
         </p:txBody>
       </p:sp>
@@ -2517,8 +2517,8 @@
         </p:nvSpPr>
         <p:spPr>
           <a:xfrm>
-            <a:off x="457200" y="6492240"/>
-            <a:ext cx="6858000" cy="256032"/>
+            <a:off x="457200" y="6583680"/>
+            <a:ext cx="6858000" cy="274320"/>
           </a:xfrm>
           <a:prstGeom prst="rect">
             <a:avLst/>
@@ -2534,7 +2534,7 @@
               <a:buNone/>
             </a:pPr>
             <a:r>
-              <a:rPr lang="en-US" sz="1000" b="1" spc="400" kern="0" dirty="0">
+              <a:rPr lang="en-US" sz="1100" b="1" spc="400" kern="0" dirty="0">
                 <a:solidFill>
                   <a:srgbClr val="B45309"/>
                 </a:solidFill>
@@ -2544,7 +2544,7 @@
               </a:rPr>
               <a:t>WHAT WE COVER</a:t>
             </a:r>
-            <a:endParaRPr lang="en-US" sz="1000" dirty="0"/>
+            <a:endParaRPr lang="en-US" sz="1100" dirty="0"/>
           </a:p>
         </p:txBody>
       </p:sp>
@@ -2556,7 +2556,7 @@
         </p:nvSpPr>
         <p:spPr>
           <a:xfrm>
-            <a:off x="457200" y="6784848"/>
+            <a:off x="457200" y="6894576"/>
             <a:ext cx="6858000" cy="502920"/>
           </a:xfrm>
           <a:prstGeom prst="rect">
@@ -2573,7 +2573,7 @@
               <a:buNone/>
             </a:pPr>
             <a:r>
-              <a:rPr lang="en-US" sz="1150" dirty="0">
+              <a:rPr lang="en-US" sz="1250" dirty="0">
                 <a:solidFill>
                   <a:srgbClr val="0C2A3D"/>
                 </a:solidFill>
@@ -2583,7 +2583,7 @@
               </a:rPr>
               <a:t>Internal Medicine  ·  Surgery  ·  OB-GYN  ·  Pediatrics  ·  Psychiatry  ·  Family Medicine  ·  Preventive Medicine  ·  Ethics  ·  Biostatistics  ·  Patient Safety</a:t>
             </a:r>
-            <a:endParaRPr lang="en-US" sz="1150" dirty="0"/>
+            <a:endParaRPr lang="en-US" sz="1250" dirty="0"/>
           </a:p>
         </p:txBody>
       </p:sp>
@@ -2595,7 +2595,7 @@
         </p:nvSpPr>
         <p:spPr>
           <a:xfrm>
-            <a:off x="457200" y="7772400"/>
+            <a:off x="457200" y="7909560"/>
             <a:ext cx="6858000" cy="777240"/>
           </a:xfrm>
           <a:prstGeom prst="rect">
@@ -2620,7 +2620,7 @@
         </p:nvSpPr>
         <p:spPr>
           <a:xfrm>
-            <a:off x="457200" y="7772400"/>
+            <a:off x="457200" y="7909560"/>
             <a:ext cx="91440" cy="777240"/>
           </a:xfrm>
           <a:prstGeom prst="rect">
@@ -2645,7 +2645,7 @@
         </p:nvSpPr>
         <p:spPr>
           <a:xfrm>
-            <a:off x="731520" y="7863840"/>
+            <a:off x="731520" y="7982712"/>
             <a:ext cx="6492240" cy="274320"/>
           </a:xfrm>
           <a:prstGeom prst="rect">
@@ -2662,7 +2662,7 @@
               <a:buNone/>
             </a:pPr>
             <a:r>
-              <a:rPr lang="en-US" sz="1300" b="1" dirty="0">
+              <a:rPr lang="en-US" sz="1400" b="1" dirty="0">
                 <a:solidFill>
                   <a:srgbClr val="FFFFFF"/>
                 </a:solidFill>
@@ -2672,7 +2672,7 @@
               </a:rPr>
               <a:t>Doing both Step 1 &amp; 2?</a:t>
             </a:r>
-            <a:endParaRPr lang="en-US" sz="1300" dirty="0"/>
+            <a:endParaRPr lang="en-US" sz="1400" dirty="0"/>
           </a:p>
         </p:txBody>
       </p:sp>
@@ -2684,7 +2684,7 @@
         </p:nvSpPr>
         <p:spPr>
           <a:xfrm>
-            <a:off x="731520" y="8138160"/>
+            <a:off x="731520" y="8257032"/>
             <a:ext cx="6492240" cy="384048"/>
           </a:xfrm>
           <a:prstGeom prst="rect">
@@ -2701,7 +2701,7 @@
               <a:buNone/>
             </a:pPr>
             <a:r>
-              <a:rPr lang="en-US" sz="1050" dirty="0">
+              <a:rPr lang="en-US" sz="1150" dirty="0">
                 <a:solidFill>
                   <a:srgbClr val="FFFFFF"/>
                 </a:solidFill>
@@ -2711,7 +2711,7 @@
               </a:rPr>
               <a:t>Take the expedited combined prep — overlapping topics taught once, reinforced across both Steps. Save time, retain more.</a:t>
             </a:r>
-            <a:endParaRPr lang="en-US" sz="1050" dirty="0"/>
+            <a:endParaRPr lang="en-US" sz="1150" dirty="0"/>
           </a:p>
         </p:txBody>
       </p:sp>
@@ -2724,7 +2724,7 @@
         <p:spPr>
           <a:xfrm>
             <a:off x="457200" y="8732520"/>
-            <a:ext cx="6858000" cy="274320"/>
+            <a:ext cx="6858000" cy="201168"/>
           </a:xfrm>
           <a:prstGeom prst="rect">
             <a:avLst/>
@@ -2740,7 +2740,7 @@
               <a:buNone/>
             </a:pPr>
             <a:r>
-              <a:rPr lang="en-US" sz="1000" b="1" spc="400" kern="0" dirty="0">
+              <a:rPr lang="en-US" sz="1100" b="1" spc="400" kern="0" dirty="0">
                 <a:solidFill>
                   <a:srgbClr val="B45309"/>
                 </a:solidFill>
@@ -2750,7 +2750,7 @@
               </a:rPr>
               <a:t>SIGN UP</a:t>
             </a:r>
-            <a:endParaRPr lang="en-US" sz="1000" dirty="0"/>
+            <a:endParaRPr lang="en-US" sz="1100" dirty="0"/>
           </a:p>
         </p:txBody>
       </p:sp>
@@ -2762,8 +2762,8 @@
         </p:nvSpPr>
         <p:spPr>
           <a:xfrm>
-            <a:off x="457200" y="8979408"/>
-            <a:ext cx="6858000" cy="384048"/>
+            <a:off x="457200" y="8915400"/>
+            <a:ext cx="6858000" cy="402336"/>
           </a:xfrm>
           <a:prstGeom prst="rect">
             <a:avLst/>
@@ -2779,7 +2779,7 @@
               <a:buNone/>
             </a:pPr>
             <a:r>
-              <a:rPr lang="en-US" sz="2200" b="1" dirty="0">
+              <a:rPr lang="en-US" sz="2400" b="1" dirty="0">
                 <a:solidFill>
                   <a:srgbClr val="D97706"/>
                 </a:solidFill>
@@ -2789,7 +2789,7 @@
               </a:rPr>
               <a:t>bakesiga.github.io/usmle-dashboard</a:t>
             </a:r>
-            <a:endParaRPr lang="en-US" sz="2200" dirty="0"/>
+            <a:endParaRPr lang="en-US" sz="2400" dirty="0"/>
           </a:p>
         </p:txBody>
       </p:sp>
@@ -2801,7 +2801,7 @@
         </p:nvSpPr>
         <p:spPr>
           <a:xfrm>
-            <a:off x="457200" y="9518904"/>
+            <a:off x="457200" y="9427464"/>
             <a:ext cx="164592" cy="164592"/>
           </a:xfrm>
           <a:prstGeom prst="ellipse">
@@ -2826,8 +2826,8 @@
         </p:nvSpPr>
         <p:spPr>
           <a:xfrm>
-            <a:off x="713232" y="9445752"/>
-            <a:ext cx="6601968" cy="292608"/>
+            <a:off x="694944" y="9372600"/>
+            <a:ext cx="3099816" cy="274320"/>
           </a:xfrm>
           <a:prstGeom prst="rect">
             <a:avLst/>
@@ -2843,7 +2843,7 @@
               <a:buNone/>
             </a:pPr>
             <a:r>
-              <a:rPr lang="en-US" sz="1200" b="1" dirty="0">
+              <a:rPr lang="en-US" sz="1250" b="1" dirty="0">
                 <a:solidFill>
                   <a:srgbClr val="0C2A3D"/>
                 </a:solidFill>
@@ -2851,22 +2851,124 @@
                 <a:ea typeface="Calibri" pitchFamily="34" charset="-122"/>
                 <a:cs typeface="Calibri" pitchFamily="34" charset="-120"/>
               </a:rPr>
-              <a:t>allanbakesiga@gmail.com  ·  Limited cohort</a:t>
-            </a:r>
-            <a:endParaRPr lang="en-US" sz="1200" dirty="0"/>
-          </a:p>
-        </p:txBody>
-      </p:sp>
-      <p:sp>
-        <p:nvSpPr>
-          <p:cNvPr id="60" name="Shape 58"/>
-          <p:cNvSpPr/>
-          <p:nvPr/>
-        </p:nvSpPr>
-        <p:spPr>
-          <a:xfrm>
-            <a:off x="0" y="9784080"/>
-            <a:ext cx="7772400" cy="54864"/>
+              <a:t>allanbakesiga@gmail.com</a:t>
+            </a:r>
+            <a:endParaRPr lang="en-US" sz="1250" dirty="0"/>
+          </a:p>
+        </p:txBody>
+      </p:sp>
+      <p:pic>
+        <p:nvPicPr>
+          <p:cNvPr id="60" name="Image 0" descr="whatsapp.png">    </p:cNvPr>
+          <p:cNvPicPr>
+            <a:picLocks noChangeAspect="1"/>
+          </p:cNvPicPr>
+          <p:nvPr/>
+        </p:nvPicPr>
+        <p:blipFill>
+          <a:blip r:embed="rId1"/>
+          <a:stretch>
+            <a:fillRect/>
+          </a:stretch>
+        </p:blipFill>
+        <p:spPr>
+          <a:xfrm>
+            <a:off x="3977640" y="9390888"/>
+            <a:ext cx="237744" cy="237744"/>
+          </a:xfrm>
+          <a:prstGeom prst="rect">
+            <a:avLst/>
+          </a:prstGeom>
+        </p:spPr>
+      </p:pic>
+      <p:sp>
+        <p:nvSpPr>
+          <p:cNvPr id="61" name="Text 58"/>
+          <p:cNvSpPr/>
+          <p:nvPr/>
+        </p:nvSpPr>
+        <p:spPr>
+          <a:xfrm>
+            <a:off x="4288536" y="9372600"/>
+            <a:ext cx="2843784" cy="274320"/>
+          </a:xfrm>
+          <a:prstGeom prst="rect">
+            <a:avLst/>
+          </a:prstGeom>
+          <a:noFill/>
+          <a:ln/>
+        </p:spPr>
+        <p:txBody>
+          <a:bodyPr wrap="square" lIns="0" tIns="0" rIns="0" bIns="0" rtlCol="0" anchor="ctr"/>
+          <a:lstStyle/>
+          <a:p>
+            <a:pPr indent="0" marL="0">
+              <a:buNone/>
+            </a:pPr>
+            <a:r>
+              <a:rPr lang="en-US" sz="1250" b="1" dirty="0">
+                <a:solidFill>
+                  <a:srgbClr val="0C2A3D"/>
+                </a:solidFill>
+                <a:latin typeface="Calibri" pitchFamily="34" charset="0"/>
+                <a:ea typeface="Calibri" pitchFamily="34" charset="-122"/>
+                <a:cs typeface="Calibri" pitchFamily="34" charset="-120"/>
+              </a:rPr>
+              <a:t>WhatsApp · +256 705 571 443</a:t>
+            </a:r>
+            <a:endParaRPr lang="en-US" sz="1250" dirty="0"/>
+          </a:p>
+        </p:txBody>
+      </p:sp>
+      <p:sp>
+        <p:nvSpPr>
+          <p:cNvPr id="62" name="Text 59"/>
+          <p:cNvSpPr/>
+          <p:nvPr/>
+        </p:nvSpPr>
+        <p:spPr>
+          <a:xfrm>
+            <a:off x="457200" y="9683496"/>
+            <a:ext cx="6858000" cy="182880"/>
+          </a:xfrm>
+          <a:prstGeom prst="rect">
+            <a:avLst/>
+          </a:prstGeom>
+          <a:noFill/>
+          <a:ln/>
+        </p:spPr>
+        <p:txBody>
+          <a:bodyPr wrap="square" lIns="0" tIns="0" rIns="0" bIns="0" rtlCol="0" anchor="ctr"/>
+          <a:lstStyle/>
+          <a:p>
+            <a:pPr algn="l" indent="0" marL="0">
+              <a:buNone/>
+            </a:pPr>
+            <a:r>
+              <a:rPr lang="en-US" sz="950" i="1" dirty="0">
+                <a:solidFill>
+                  <a:srgbClr val="6B87A3"/>
+                </a:solidFill>
+                <a:latin typeface="Calibri" pitchFamily="34" charset="0"/>
+                <a:ea typeface="Calibri" pitchFamily="34" charset="-122"/>
+                <a:cs typeface="Calibri" pitchFamily="34" charset="-120"/>
+              </a:rPr>
+              <a:t>Limited cohort · Sign in with the Gmail Allan adds you under</a:t>
+            </a:r>
+            <a:endParaRPr lang="en-US" sz="950" dirty="0"/>
+          </a:p>
+        </p:txBody>
+      </p:sp>
+      <p:sp>
+        <p:nvSpPr>
+          <p:cNvPr id="63" name="Shape 60"/>
+          <p:cNvSpPr/>
+          <p:nvPr/>
+        </p:nvSpPr>
+        <p:spPr>
+          <a:xfrm>
+            <a:off x="0" y="9875520"/>
+            <a:ext cx="7772400" cy="45720"/>
           </a:xfrm>
           <a:prstGeom prst="rect">
             <a:avLst/>
@@ -2884,14 +2986,14 @@
       </p:sp>
       <p:sp>
         <p:nvSpPr>
-          <p:cNvPr id="61" name="Shape 59"/>
-          <p:cNvSpPr/>
-          <p:nvPr/>
-        </p:nvSpPr>
-        <p:spPr>
-          <a:xfrm>
-            <a:off x="0" y="9838944"/>
-            <a:ext cx="7772400" cy="219456"/>
+          <p:cNvPr id="64" name="Shape 61"/>
+          <p:cNvSpPr/>
+          <p:nvPr/>
+        </p:nvSpPr>
+        <p:spPr>
+          <a:xfrm>
+            <a:off x="0" y="9921240"/>
+            <a:ext cx="7772400" cy="137160"/>
           </a:xfrm>
           <a:prstGeom prst="rect">
             <a:avLst/>

--- a/outputs/flyers/USMLE_Step2_Flyer.pptx
+++ b/outputs/flyers/USMLE_Step2_Flyer.pptx
@@ -2595,7 +2595,7 @@
         </p:nvSpPr>
         <p:spPr>
           <a:xfrm>
-            <a:off x="457200" y="7909560"/>
+            <a:off x="457200" y="7443216"/>
             <a:ext cx="6858000" cy="777240"/>
           </a:xfrm>
           <a:prstGeom prst="rect">
@@ -2620,7 +2620,7 @@
         </p:nvSpPr>
         <p:spPr>
           <a:xfrm>
-            <a:off x="457200" y="7909560"/>
+            <a:off x="457200" y="7443216"/>
             <a:ext cx="91440" cy="777240"/>
           </a:xfrm>
           <a:prstGeom prst="rect">
@@ -2645,7 +2645,7 @@
         </p:nvSpPr>
         <p:spPr>
           <a:xfrm>
-            <a:off x="731520" y="7982712"/>
+            <a:off x="731520" y="7516368"/>
             <a:ext cx="6492240" cy="274320"/>
           </a:xfrm>
           <a:prstGeom prst="rect">
@@ -2684,7 +2684,7 @@
         </p:nvSpPr>
         <p:spPr>
           <a:xfrm>
-            <a:off x="731520" y="8257032"/>
+            <a:off x="731520" y="7790688"/>
             <a:ext cx="6492240" cy="384048"/>
           </a:xfrm>
           <a:prstGeom prst="rect">
@@ -2928,8 +2928,8 @@
         </p:nvSpPr>
         <p:spPr>
           <a:xfrm>
-            <a:off x="457200" y="9683496"/>
-            <a:ext cx="6858000" cy="182880"/>
+            <a:off x="457200" y="9665208"/>
+            <a:ext cx="6858000" cy="164592"/>
           </a:xfrm>
           <a:prstGeom prst="rect">
             <a:avLst/>

--- a/outputs/flyers/USMLE_Step2_Flyer.pptx
+++ b/outputs/flyers/USMLE_Step2_Flyer.pptx
@@ -1231,8 +1231,8 @@
         </p:nvSpPr>
         <p:spPr>
           <a:xfrm>
-            <a:off x="640080" y="2130552"/>
-            <a:ext cx="713232" cy="713232"/>
+            <a:off x="603504" y="2093976"/>
+            <a:ext cx="786384" cy="786384"/>
           </a:xfrm>
           <a:prstGeom prst="ellipse">
             <a:avLst/>
@@ -1248,48 +1248,32 @@
           </a:ln>
         </p:spPr>
       </p:sp>
-      <p:sp>
-        <p:nvSpPr>
-          <p:cNvPr id="13" name="Text 11"/>
-          <p:cNvSpPr/>
-          <p:nvPr/>
-        </p:nvSpPr>
+      <p:pic>
+        <p:nvPicPr>
+          <p:cNvPr id="13" name="Image 0" descr="allan.jpg">    </p:cNvPr>
+          <p:cNvPicPr>
+            <a:picLocks noChangeAspect="1"/>
+          </p:cNvPicPr>
+          <p:nvPr/>
+        </p:nvPicPr>
+        <p:blipFill>
+          <a:blip r:embed="rId1"/>
+          <a:srcRect l="0" r="0" t="0" b="0"/>
+          <a:stretch/>
+        </p:blipFill>
         <p:spPr>
           <a:xfrm>
             <a:off x="640080" y="2130552"/>
             <a:ext cx="713232" cy="713232"/>
           </a:xfrm>
-          <a:prstGeom prst="rect">
-            <a:avLst/>
-          </a:prstGeom>
-          <a:noFill/>
-          <a:ln/>
-        </p:spPr>
-        <p:txBody>
-          <a:bodyPr wrap="square" lIns="0" tIns="0" rIns="0" bIns="0" rtlCol="0" anchor="ctr"/>
-          <a:lstStyle/>
-          <a:p>
-            <a:pPr algn="ctr" indent="0" marL="0">
-              <a:buNone/>
-            </a:pPr>
-            <a:r>
-              <a:rPr lang="en-US" sz="2400" b="1" dirty="0">
-                <a:solidFill>
-                  <a:srgbClr val="FFFFFF"/>
-                </a:solidFill>
-                <a:latin typeface="Arial Black" pitchFamily="34" charset="0"/>
-                <a:ea typeface="Arial Black" pitchFamily="34" charset="-122"/>
-                <a:cs typeface="Arial Black" pitchFamily="34" charset="-120"/>
-              </a:rPr>
-              <a:t>AB</a:t>
-            </a:r>
-            <a:endParaRPr lang="en-US" sz="2400" dirty="0"/>
-          </a:p>
-        </p:txBody>
-      </p:sp>
-      <p:sp>
-        <p:nvSpPr>
-          <p:cNvPr id="14" name="Text 12"/>
+          <a:prstGeom prst="ellipse">
+            <a:avLst/>
+          </a:prstGeom>
+        </p:spPr>
+      </p:pic>
+      <p:sp>
+        <p:nvSpPr>
+          <p:cNvPr id="14" name="Text 11"/>
           <p:cNvSpPr/>
           <p:nvPr/>
         </p:nvSpPr>
@@ -1328,7 +1312,7 @@
       </p:sp>
       <p:sp>
         <p:nvSpPr>
-          <p:cNvPr id="15" name="Text 13"/>
+          <p:cNvPr id="15" name="Text 12"/>
           <p:cNvSpPr/>
           <p:nvPr/>
         </p:nvSpPr>
@@ -1367,7 +1351,7 @@
       </p:sp>
       <p:sp>
         <p:nvSpPr>
-          <p:cNvPr id="16" name="Text 14"/>
+          <p:cNvPr id="16" name="Text 13"/>
           <p:cNvSpPr/>
           <p:nvPr/>
         </p:nvSpPr>
@@ -1406,7 +1390,7 @@
       </p:sp>
       <p:sp>
         <p:nvSpPr>
-          <p:cNvPr id="17" name="Shape 15"/>
+          <p:cNvPr id="17" name="Shape 14"/>
           <p:cNvSpPr/>
           <p:nvPr/>
         </p:nvSpPr>
@@ -1431,7 +1415,7 @@
       </p:sp>
       <p:sp>
         <p:nvSpPr>
-          <p:cNvPr id="18" name="Text 16"/>
+          <p:cNvPr id="18" name="Text 15"/>
           <p:cNvSpPr/>
           <p:nvPr/>
         </p:nvSpPr>
@@ -1470,7 +1454,7 @@
       </p:sp>
       <p:sp>
         <p:nvSpPr>
-          <p:cNvPr id="19" name="Text 17"/>
+          <p:cNvPr id="19" name="Text 16"/>
           <p:cNvSpPr/>
           <p:nvPr/>
         </p:nvSpPr>
@@ -1509,7 +1493,7 @@
       </p:sp>
       <p:sp>
         <p:nvSpPr>
-          <p:cNvPr id="20" name="Shape 18"/>
+          <p:cNvPr id="20" name="Shape 17"/>
           <p:cNvSpPr/>
           <p:nvPr/>
         </p:nvSpPr>
@@ -1534,7 +1518,7 @@
       </p:sp>
       <p:sp>
         <p:nvSpPr>
-          <p:cNvPr id="21" name="Text 19"/>
+          <p:cNvPr id="21" name="Text 18"/>
           <p:cNvSpPr/>
           <p:nvPr/>
         </p:nvSpPr>
@@ -1573,7 +1557,7 @@
       </p:sp>
       <p:sp>
         <p:nvSpPr>
-          <p:cNvPr id="22" name="Text 20"/>
+          <p:cNvPr id="22" name="Text 19"/>
           <p:cNvSpPr/>
           <p:nvPr/>
         </p:nvSpPr>
@@ -1612,7 +1596,7 @@
       </p:sp>
       <p:sp>
         <p:nvSpPr>
-          <p:cNvPr id="23" name="Shape 21"/>
+          <p:cNvPr id="23" name="Shape 20"/>
           <p:cNvSpPr/>
           <p:nvPr/>
         </p:nvSpPr>
@@ -1637,7 +1621,7 @@
       </p:sp>
       <p:sp>
         <p:nvSpPr>
-          <p:cNvPr id="24" name="Text 22"/>
+          <p:cNvPr id="24" name="Text 21"/>
           <p:cNvSpPr/>
           <p:nvPr/>
         </p:nvSpPr>
@@ -1676,7 +1660,7 @@
       </p:sp>
       <p:sp>
         <p:nvSpPr>
-          <p:cNvPr id="25" name="Text 23"/>
+          <p:cNvPr id="25" name="Text 22"/>
           <p:cNvSpPr/>
           <p:nvPr/>
         </p:nvSpPr>
@@ -1715,7 +1699,7 @@
       </p:sp>
       <p:sp>
         <p:nvSpPr>
-          <p:cNvPr id="26" name="Shape 24"/>
+          <p:cNvPr id="26" name="Shape 23"/>
           <p:cNvSpPr/>
           <p:nvPr/>
         </p:nvSpPr>
@@ -1747,7 +1731,7 @@
       </p:sp>
       <p:sp>
         <p:nvSpPr>
-          <p:cNvPr id="27" name="Shape 25"/>
+          <p:cNvPr id="27" name="Shape 24"/>
           <p:cNvSpPr/>
           <p:nvPr/>
         </p:nvSpPr>
@@ -1772,7 +1756,7 @@
       </p:sp>
       <p:sp>
         <p:nvSpPr>
-          <p:cNvPr id="28" name="Shape 26"/>
+          <p:cNvPr id="28" name="Shape 25"/>
           <p:cNvSpPr/>
           <p:nvPr/>
         </p:nvSpPr>
@@ -1797,7 +1781,7 @@
       </p:sp>
       <p:sp>
         <p:nvSpPr>
-          <p:cNvPr id="29" name="Text 27"/>
+          <p:cNvPr id="29" name="Text 26"/>
           <p:cNvSpPr/>
           <p:nvPr/>
         </p:nvSpPr>
@@ -1836,7 +1820,7 @@
       </p:sp>
       <p:sp>
         <p:nvSpPr>
-          <p:cNvPr id="30" name="Text 28"/>
+          <p:cNvPr id="30" name="Text 27"/>
           <p:cNvSpPr/>
           <p:nvPr/>
         </p:nvSpPr>
@@ -1875,7 +1859,7 @@
       </p:sp>
       <p:sp>
         <p:nvSpPr>
-          <p:cNvPr id="31" name="Text 29"/>
+          <p:cNvPr id="31" name="Text 28"/>
           <p:cNvSpPr/>
           <p:nvPr/>
         </p:nvSpPr>
@@ -1914,7 +1898,7 @@
       </p:sp>
       <p:sp>
         <p:nvSpPr>
-          <p:cNvPr id="32" name="Shape 30"/>
+          <p:cNvPr id="32" name="Shape 29"/>
           <p:cNvSpPr/>
           <p:nvPr/>
         </p:nvSpPr>
@@ -1946,7 +1930,7 @@
       </p:sp>
       <p:sp>
         <p:nvSpPr>
-          <p:cNvPr id="33" name="Shape 31"/>
+          <p:cNvPr id="33" name="Shape 30"/>
           <p:cNvSpPr/>
           <p:nvPr/>
         </p:nvSpPr>
@@ -1971,7 +1955,7 @@
       </p:sp>
       <p:sp>
         <p:nvSpPr>
-          <p:cNvPr id="34" name="Shape 32"/>
+          <p:cNvPr id="34" name="Shape 31"/>
           <p:cNvSpPr/>
           <p:nvPr/>
         </p:nvSpPr>
@@ -1996,7 +1980,7 @@
       </p:sp>
       <p:sp>
         <p:nvSpPr>
-          <p:cNvPr id="35" name="Text 33"/>
+          <p:cNvPr id="35" name="Text 32"/>
           <p:cNvSpPr/>
           <p:nvPr/>
         </p:nvSpPr>
@@ -2035,7 +2019,7 @@
       </p:sp>
       <p:sp>
         <p:nvSpPr>
-          <p:cNvPr id="36" name="Text 34"/>
+          <p:cNvPr id="36" name="Text 33"/>
           <p:cNvSpPr/>
           <p:nvPr/>
         </p:nvSpPr>
@@ -2074,7 +2058,7 @@
       </p:sp>
       <p:sp>
         <p:nvSpPr>
-          <p:cNvPr id="37" name="Text 35"/>
+          <p:cNvPr id="37" name="Text 34"/>
           <p:cNvSpPr/>
           <p:nvPr/>
         </p:nvSpPr>
@@ -2113,7 +2097,7 @@
       </p:sp>
       <p:sp>
         <p:nvSpPr>
-          <p:cNvPr id="38" name="Shape 36"/>
+          <p:cNvPr id="38" name="Shape 35"/>
           <p:cNvSpPr/>
           <p:nvPr/>
         </p:nvSpPr>
@@ -2145,7 +2129,7 @@
       </p:sp>
       <p:sp>
         <p:nvSpPr>
-          <p:cNvPr id="39" name="Shape 37"/>
+          <p:cNvPr id="39" name="Shape 36"/>
           <p:cNvSpPr/>
           <p:nvPr/>
         </p:nvSpPr>
@@ -2170,7 +2154,7 @@
       </p:sp>
       <p:sp>
         <p:nvSpPr>
-          <p:cNvPr id="40" name="Shape 38"/>
+          <p:cNvPr id="40" name="Shape 37"/>
           <p:cNvSpPr/>
           <p:nvPr/>
         </p:nvSpPr>
@@ -2195,7 +2179,7 @@
       </p:sp>
       <p:sp>
         <p:nvSpPr>
-          <p:cNvPr id="41" name="Text 39"/>
+          <p:cNvPr id="41" name="Text 38"/>
           <p:cNvSpPr/>
           <p:nvPr/>
         </p:nvSpPr>
@@ -2234,7 +2218,7 @@
       </p:sp>
       <p:sp>
         <p:nvSpPr>
-          <p:cNvPr id="42" name="Text 40"/>
+          <p:cNvPr id="42" name="Text 39"/>
           <p:cNvSpPr/>
           <p:nvPr/>
         </p:nvSpPr>
@@ -2273,7 +2257,7 @@
       </p:sp>
       <p:sp>
         <p:nvSpPr>
-          <p:cNvPr id="43" name="Text 41"/>
+          <p:cNvPr id="43" name="Text 40"/>
           <p:cNvSpPr/>
           <p:nvPr/>
         </p:nvSpPr>
@@ -2312,7 +2296,7 @@
       </p:sp>
       <p:sp>
         <p:nvSpPr>
-          <p:cNvPr id="44" name="Shape 42"/>
+          <p:cNvPr id="44" name="Shape 41"/>
           <p:cNvSpPr/>
           <p:nvPr/>
         </p:nvSpPr>
@@ -2344,7 +2328,7 @@
       </p:sp>
       <p:sp>
         <p:nvSpPr>
-          <p:cNvPr id="45" name="Shape 43"/>
+          <p:cNvPr id="45" name="Shape 42"/>
           <p:cNvSpPr/>
           <p:nvPr/>
         </p:nvSpPr>
@@ -2369,7 +2353,7 @@
       </p:sp>
       <p:sp>
         <p:nvSpPr>
-          <p:cNvPr id="46" name="Shape 44"/>
+          <p:cNvPr id="46" name="Shape 43"/>
           <p:cNvSpPr/>
           <p:nvPr/>
         </p:nvSpPr>
@@ -2394,7 +2378,7 @@
       </p:sp>
       <p:sp>
         <p:nvSpPr>
-          <p:cNvPr id="47" name="Text 45"/>
+          <p:cNvPr id="47" name="Text 44"/>
           <p:cNvSpPr/>
           <p:nvPr/>
         </p:nvSpPr>
@@ -2433,7 +2417,7 @@
       </p:sp>
       <p:sp>
         <p:nvSpPr>
-          <p:cNvPr id="48" name="Text 46"/>
+          <p:cNvPr id="48" name="Text 45"/>
           <p:cNvSpPr/>
           <p:nvPr/>
         </p:nvSpPr>
@@ -2472,7 +2456,7 @@
       </p:sp>
       <p:sp>
         <p:nvSpPr>
-          <p:cNvPr id="49" name="Text 47"/>
+          <p:cNvPr id="49" name="Text 46"/>
           <p:cNvSpPr/>
           <p:nvPr/>
         </p:nvSpPr>
@@ -2511,7 +2495,7 @@
       </p:sp>
       <p:sp>
         <p:nvSpPr>
-          <p:cNvPr id="50" name="Text 48"/>
+          <p:cNvPr id="50" name="Text 47"/>
           <p:cNvSpPr/>
           <p:nvPr/>
         </p:nvSpPr>
@@ -2550,7 +2534,7 @@
       </p:sp>
       <p:sp>
         <p:nvSpPr>
-          <p:cNvPr id="51" name="Text 49"/>
+          <p:cNvPr id="51" name="Text 48"/>
           <p:cNvSpPr/>
           <p:nvPr/>
         </p:nvSpPr>
@@ -2589,7 +2573,7 @@
       </p:sp>
       <p:sp>
         <p:nvSpPr>
-          <p:cNvPr id="52" name="Shape 50"/>
+          <p:cNvPr id="52" name="Shape 49"/>
           <p:cNvSpPr/>
           <p:nvPr/>
         </p:nvSpPr>
@@ -2614,7 +2598,7 @@
       </p:sp>
       <p:sp>
         <p:nvSpPr>
-          <p:cNvPr id="53" name="Shape 51"/>
+          <p:cNvPr id="53" name="Shape 50"/>
           <p:cNvSpPr/>
           <p:nvPr/>
         </p:nvSpPr>
@@ -2639,7 +2623,7 @@
       </p:sp>
       <p:sp>
         <p:nvSpPr>
-          <p:cNvPr id="54" name="Text 52"/>
+          <p:cNvPr id="54" name="Text 51"/>
           <p:cNvSpPr/>
           <p:nvPr/>
         </p:nvSpPr>
@@ -2678,7 +2662,7 @@
       </p:sp>
       <p:sp>
         <p:nvSpPr>
-          <p:cNvPr id="55" name="Text 53"/>
+          <p:cNvPr id="55" name="Text 52"/>
           <p:cNvSpPr/>
           <p:nvPr/>
         </p:nvSpPr>
@@ -2717,7 +2701,7 @@
       </p:sp>
       <p:sp>
         <p:nvSpPr>
-          <p:cNvPr id="56" name="Text 54"/>
+          <p:cNvPr id="56" name="Text 53"/>
           <p:cNvSpPr/>
           <p:nvPr/>
         </p:nvSpPr>
@@ -2756,7 +2740,7 @@
       </p:sp>
       <p:sp>
         <p:nvSpPr>
-          <p:cNvPr id="57" name="Text 55"/>
+          <p:cNvPr id="57" name="Text 54"/>
           <p:cNvSpPr/>
           <p:nvPr/>
         </p:nvSpPr>
@@ -2795,7 +2779,7 @@
       </p:sp>
       <p:sp>
         <p:nvSpPr>
-          <p:cNvPr id="58" name="Shape 56"/>
+          <p:cNvPr id="58" name="Shape 55"/>
           <p:cNvSpPr/>
           <p:nvPr/>
         </p:nvSpPr>
@@ -2820,7 +2804,7 @@
       </p:sp>
       <p:sp>
         <p:nvSpPr>
-          <p:cNvPr id="59" name="Text 57"/>
+          <p:cNvPr id="59" name="Text 56"/>
           <p:cNvSpPr/>
           <p:nvPr/>
         </p:nvSpPr>
@@ -2859,14 +2843,14 @@
       </p:sp>
       <p:pic>
         <p:nvPicPr>
-          <p:cNvPr id="60" name="Image 0" descr="whatsapp.png">    </p:cNvPr>
+          <p:cNvPr id="60" name="Image 1" descr="whatsapp.png">    </p:cNvPr>
           <p:cNvPicPr>
             <a:picLocks noChangeAspect="1"/>
           </p:cNvPicPr>
           <p:nvPr/>
         </p:nvPicPr>
         <p:blipFill>
-          <a:blip r:embed="rId1"/>
+          <a:blip r:embed="rId2"/>
           <a:stretch>
             <a:fillRect/>
           </a:stretch>
@@ -2883,7 +2867,7 @@
       </p:pic>
       <p:sp>
         <p:nvSpPr>
-          <p:cNvPr id="61" name="Text 58"/>
+          <p:cNvPr id="61" name="Text 57"/>
           <p:cNvSpPr/>
           <p:nvPr/>
         </p:nvSpPr>
@@ -2922,7 +2906,7 @@
       </p:sp>
       <p:sp>
         <p:nvSpPr>
-          <p:cNvPr id="62" name="Text 59"/>
+          <p:cNvPr id="62" name="Text 58"/>
           <p:cNvSpPr/>
           <p:nvPr/>
         </p:nvSpPr>
@@ -2961,7 +2945,7 @@
       </p:sp>
       <p:sp>
         <p:nvSpPr>
-          <p:cNvPr id="63" name="Shape 60"/>
+          <p:cNvPr id="63" name="Shape 59"/>
           <p:cNvSpPr/>
           <p:nvPr/>
         </p:nvSpPr>
@@ -2986,7 +2970,7 @@
       </p:sp>
       <p:sp>
         <p:nvSpPr>
-          <p:cNvPr id="64" name="Shape 61"/>
+          <p:cNvPr id="64" name="Shape 60"/>
           <p:cNvSpPr/>
           <p:nvPr/>
         </p:nvSpPr>

--- a/outputs/flyers/USMLE_Step2_Flyer.pptx
+++ b/outputs/flyers/USMLE_Step2_Flyer.pptx
@@ -2707,7 +2707,7 @@
         </p:nvSpPr>
         <p:spPr>
           <a:xfrm>
-            <a:off x="457200" y="8732520"/>
+            <a:off x="457200" y="8449056"/>
             <a:ext cx="6858000" cy="201168"/>
           </a:xfrm>
           <a:prstGeom prst="rect">
@@ -2746,7 +2746,7 @@
         </p:nvSpPr>
         <p:spPr>
           <a:xfrm>
-            <a:off x="457200" y="8915400"/>
+            <a:off x="457200" y="8631936"/>
             <a:ext cx="6858000" cy="402336"/>
           </a:xfrm>
           <a:prstGeom prst="rect">
@@ -2785,7 +2785,7 @@
         </p:nvSpPr>
         <p:spPr>
           <a:xfrm>
-            <a:off x="457200" y="9427464"/>
+            <a:off x="457200" y="9144000"/>
             <a:ext cx="164592" cy="164592"/>
           </a:xfrm>
           <a:prstGeom prst="ellipse">
@@ -2810,7 +2810,7 @@
         </p:nvSpPr>
         <p:spPr>
           <a:xfrm>
-            <a:off x="694944" y="9372600"/>
+            <a:off x="694944" y="9089136"/>
             <a:ext cx="3099816" cy="274320"/>
           </a:xfrm>
           <a:prstGeom prst="rect">
@@ -2857,7 +2857,7 @@
         </p:blipFill>
         <p:spPr>
           <a:xfrm>
-            <a:off x="3977640" y="9390888"/>
+            <a:off x="3977640" y="9107424"/>
             <a:ext cx="237744" cy="237744"/>
           </a:xfrm>
           <a:prstGeom prst="rect">
@@ -2873,7 +2873,7 @@
         </p:nvSpPr>
         <p:spPr>
           <a:xfrm>
-            <a:off x="4288536" y="9372600"/>
+            <a:off x="4288536" y="9089136"/>
             <a:ext cx="2843784" cy="274320"/>
           </a:xfrm>
           <a:prstGeom prst="rect">
@@ -2912,7 +2912,7 @@
         </p:nvSpPr>
         <p:spPr>
           <a:xfrm>
-            <a:off x="457200" y="9665208"/>
+            <a:off x="457200" y="9381744"/>
             <a:ext cx="6858000" cy="164592"/>
           </a:xfrm>
           <a:prstGeom prst="rect">

--- a/outputs/flyers/USMLE_Step2_Flyer.pptx
+++ b/outputs/flyers/USMLE_Step2_Flyer.pptx
@@ -1343,7 +1343,7 @@
                 <a:ea typeface="Calibri" pitchFamily="34" charset="-122"/>
                 <a:cs typeface="Calibri" pitchFamily="34" charset="-120"/>
               </a:rPr>
-              <a:t>MD (Makerere)  ·  MScGH (Duke)  ·  Incoming PGY-1 Neurology, Creighton</a:t>
+              <a:t>MD (Makerere)  ·  MScGH (Duke)  ·  PGY-1 Neurology Resident, Creighton</a:t>
             </a:r>
             <a:endParaRPr lang="en-US" sz="1200" dirty="0"/>
           </a:p>

--- a/outputs/flyers/USMLE_Step2_Flyer.pptx
+++ b/outputs/flyers/USMLE_Step2_Flyer.pptx
@@ -1374,7 +1374,7 @@
               <a:buNone/>
             </a:pPr>
             <a:r>
-              <a:rPr lang="en-US" sz="1100" i="1" dirty="0">
+              <a:rPr lang="en-US" sz="1050" i="1" dirty="0">
                 <a:solidFill>
                   <a:srgbClr val="B45309"/>
                 </a:solidFill>
@@ -1382,9 +1382,9 @@
                 <a:ea typeface="Calibri" pitchFamily="34" charset="-122"/>
                 <a:cs typeface="Calibri" pitchFamily="34" charset="-120"/>
               </a:rPr>
-              <a:t>Epidemiology &amp; biostatistics teaching assistant</a:t>
-            </a:r>
-            <a:endParaRPr lang="en-US" sz="1100" dirty="0"/>
+              <a:t>Teaching Assistant  |  Epidemiology &amp; Biostatistics, Duke Global Health Institute</a:t>
+            </a:r>
+            <a:endParaRPr lang="en-US" sz="1050" dirty="0"/>
           </a:p>
         </p:txBody>
       </p:sp>
@@ -2487,7 +2487,7 @@
                 <a:ea typeface="Calibri" pitchFamily="34" charset="-122"/>
                 <a:cs typeface="Calibri" pitchFamily="34" charset="-120"/>
               </a:rPr>
-              <a:t>Guidance through ECFMG, CV, personal statement, interview prep, and residency application.</a:t>
+              <a:t>Guidance through the ECFMG application, CV, personal statement, interview prep, and the residency match.</a:t>
             </a:r>
             <a:endParaRPr lang="en-US" sz="1150" dirty="0"/>
           </a:p>

--- a/outputs/flyers/USMLE_Step2_Flyer.pptx
+++ b/outputs/flyers/USMLE_Step2_Flyer.pptx
@@ -1549,7 +1549,7 @@
                 <a:ea typeface="Arial Black" pitchFamily="34" charset="-122"/>
                 <a:cs typeface="Arial Black" pitchFamily="34" charset="-120"/>
               </a:rPr>
-              <a:t>4 mo</a:t>
+              <a:t>4 months</a:t>
             </a:r>
             <a:endParaRPr lang="en-US" sz="2600" dirty="0"/>
           </a:p>

--- a/outputs/flyers/USMLE_Step2_Flyer.pptx
+++ b/outputs/flyers/USMLE_Step2_Flyer.pptx
@@ -1343,7 +1343,7 @@
                 <a:ea typeface="Calibri" pitchFamily="34" charset="-122"/>
                 <a:cs typeface="Calibri" pitchFamily="34" charset="-120"/>
               </a:rPr>
-              <a:t>MD (Makerere)  ·  MScGH (Duke)  ·  PGY-1 Neurology Resident, Creighton</a:t>
+              <a:t>MD (Makerere)  ·  MScGH (Duke)  ·  PGY-1 Neurology Resident, Creighton University</a:t>
             </a:r>
             <a:endParaRPr lang="en-US" sz="1200" dirty="0"/>
           </a:p>

--- a/outputs/flyers/USMLE_Step2_Flyer.pptx
+++ b/outputs/flyers/USMLE_Step2_Flyer.pptx
@@ -2732,118 +2732,15 @@
                 <a:ea typeface="Calibri" pitchFamily="34" charset="-122"/>
                 <a:cs typeface="Calibri" pitchFamily="34" charset="-120"/>
               </a:rPr>
-              <a:t>SIGN UP</a:t>
+              <a:t>TO SIGN UP, CONTACT ALLAN</a:t>
             </a:r>
             <a:endParaRPr lang="en-US" sz="1100" dirty="0"/>
-          </a:p>
-        </p:txBody>
-      </p:sp>
-      <p:sp>
-        <p:nvSpPr>
-          <p:cNvPr id="57" name="Text 54"/>
-          <p:cNvSpPr/>
-          <p:nvPr/>
-        </p:nvSpPr>
-        <p:spPr>
-          <a:xfrm>
-            <a:off x="457200" y="8631936"/>
-            <a:ext cx="6858000" cy="402336"/>
-          </a:xfrm>
-          <a:prstGeom prst="rect">
-            <a:avLst/>
-          </a:prstGeom>
-          <a:noFill/>
-          <a:ln/>
-        </p:spPr>
-        <p:txBody>
-          <a:bodyPr wrap="square" lIns="0" tIns="0" rIns="0" bIns="0" rtlCol="0" anchor="ctr"/>
-          <a:lstStyle/>
-          <a:p>
-            <a:pPr indent="0" marL="0">
-              <a:buNone/>
-            </a:pPr>
-            <a:r>
-              <a:rPr lang="en-US" sz="2400" b="1" dirty="0">
-                <a:solidFill>
-                  <a:srgbClr val="D97706"/>
-                </a:solidFill>
-                <a:latin typeface="Arial Black" pitchFamily="34" charset="0"/>
-                <a:ea typeface="Arial Black" pitchFamily="34" charset="-122"/>
-                <a:cs typeface="Arial Black" pitchFamily="34" charset="-120"/>
-              </a:rPr>
-              <a:t>bakesiga.github.io/usmle-dashboard</a:t>
-            </a:r>
-            <a:endParaRPr lang="en-US" sz="2400" dirty="0"/>
-          </a:p>
-        </p:txBody>
-      </p:sp>
-      <p:sp>
-        <p:nvSpPr>
-          <p:cNvPr id="58" name="Shape 55"/>
-          <p:cNvSpPr/>
-          <p:nvPr/>
-        </p:nvSpPr>
-        <p:spPr>
-          <a:xfrm>
-            <a:off x="457200" y="9144000"/>
-            <a:ext cx="164592" cy="164592"/>
-          </a:xfrm>
-          <a:prstGeom prst="ellipse">
-            <a:avLst/>
-          </a:prstGeom>
-          <a:solidFill>
-            <a:srgbClr val="D97706"/>
-          </a:solidFill>
-          <a:ln w="12700">
-            <a:solidFill>
-              <a:srgbClr val="D97706"/>
-            </a:solidFill>
-            <a:prstDash val="solid"/>
-          </a:ln>
-        </p:spPr>
-      </p:sp>
-      <p:sp>
-        <p:nvSpPr>
-          <p:cNvPr id="59" name="Text 56"/>
-          <p:cNvSpPr/>
-          <p:nvPr/>
-        </p:nvSpPr>
-        <p:spPr>
-          <a:xfrm>
-            <a:off x="694944" y="9089136"/>
-            <a:ext cx="3099816" cy="274320"/>
-          </a:xfrm>
-          <a:prstGeom prst="rect">
-            <a:avLst/>
-          </a:prstGeom>
-          <a:noFill/>
-          <a:ln/>
-        </p:spPr>
-        <p:txBody>
-          <a:bodyPr wrap="square" lIns="0" tIns="0" rIns="0" bIns="0" rtlCol="0" anchor="ctr"/>
-          <a:lstStyle/>
-          <a:p>
-            <a:pPr indent="0" marL="0">
-              <a:buNone/>
-            </a:pPr>
-            <a:r>
-              <a:rPr lang="en-US" sz="1250" b="1" dirty="0">
-                <a:solidFill>
-                  <a:srgbClr val="0C2A3D"/>
-                </a:solidFill>
-                <a:latin typeface="Calibri" pitchFamily="34" charset="0"/>
-                <a:ea typeface="Calibri" pitchFamily="34" charset="-122"/>
-                <a:cs typeface="Calibri" pitchFamily="34" charset="-120"/>
-              </a:rPr>
-              <a:t>allanbakesiga@gmail.com</a:t>
-            </a:r>
-            <a:endParaRPr lang="en-US" sz="1250" dirty="0"/>
           </a:p>
         </p:txBody>
       </p:sp>
       <p:pic>
         <p:nvPicPr>
-          <p:cNvPr id="60" name="Image 1" descr="whatsapp.png">    </p:cNvPr>
+          <p:cNvPr id="57" name="Image 1" descr="email-amber.png">    </p:cNvPr>
           <p:cNvPicPr>
             <a:picLocks noChangeAspect="1"/>
           </p:cNvPicPr>
@@ -2857,7 +2754,7 @@
         </p:blipFill>
         <p:spPr>
           <a:xfrm>
-            <a:off x="3977640" y="9107424"/>
+            <a:off x="457200" y="8705088"/>
             <a:ext cx="237744" cy="237744"/>
           </a:xfrm>
           <a:prstGeom prst="rect">
@@ -2867,14 +2764,14 @@
       </p:pic>
       <p:sp>
         <p:nvSpPr>
-          <p:cNvPr id="61" name="Text 57"/>
-          <p:cNvSpPr/>
-          <p:nvPr/>
-        </p:nvSpPr>
-        <p:spPr>
-          <a:xfrm>
-            <a:off x="4288536" y="9089136"/>
-            <a:ext cx="2843784" cy="274320"/>
+          <p:cNvPr id="58" name="Text 54"/>
+          <p:cNvSpPr/>
+          <p:nvPr/>
+        </p:nvSpPr>
+        <p:spPr>
+          <a:xfrm>
+            <a:off x="768096" y="8668512"/>
+            <a:ext cx="3026664" cy="292608"/>
           </a:xfrm>
           <a:prstGeom prst="rect">
             <a:avLst/>
@@ -2890,7 +2787,7 @@
               <a:buNone/>
             </a:pPr>
             <a:r>
-              <a:rPr lang="en-US" sz="1250" b="1" dirty="0">
+              <a:rPr lang="en-US" sz="1300" b="1" dirty="0">
                 <a:solidFill>
                   <a:srgbClr val="0C2A3D"/>
                 </a:solidFill>
@@ -2898,54 +2795,156 @@
                 <a:ea typeface="Calibri" pitchFamily="34" charset="-122"/>
                 <a:cs typeface="Calibri" pitchFamily="34" charset="-120"/>
               </a:rPr>
-              <a:t>WhatsApp · +256 705 571 443</a:t>
-            </a:r>
-            <a:endParaRPr lang="en-US" sz="1250" dirty="0"/>
-          </a:p>
-        </p:txBody>
-      </p:sp>
-      <p:sp>
-        <p:nvSpPr>
-          <p:cNvPr id="62" name="Text 58"/>
-          <p:cNvSpPr/>
-          <p:nvPr/>
-        </p:nvSpPr>
-        <p:spPr>
-          <a:xfrm>
-            <a:off x="457200" y="9381744"/>
-            <a:ext cx="6858000" cy="164592"/>
-          </a:xfrm>
-          <a:prstGeom prst="rect">
-            <a:avLst/>
-          </a:prstGeom>
-          <a:noFill/>
-          <a:ln/>
-        </p:spPr>
-        <p:txBody>
-          <a:bodyPr wrap="square" lIns="0" tIns="0" rIns="0" bIns="0" rtlCol="0" anchor="ctr"/>
-          <a:lstStyle/>
-          <a:p>
-            <a:pPr algn="l" indent="0" marL="0">
-              <a:buNone/>
-            </a:pPr>
-            <a:r>
-              <a:rPr lang="en-US" sz="950" i="1" dirty="0">
-                <a:solidFill>
-                  <a:srgbClr val="6B87A3"/>
+              <a:t>allanbakesiga@gmail.com</a:t>
+            </a:r>
+            <a:endParaRPr lang="en-US" sz="1300" dirty="0"/>
+          </a:p>
+        </p:txBody>
+      </p:sp>
+      <p:pic>
+        <p:nvPicPr>
+          <p:cNvPr id="59" name="Image 2" descr="whatsapp.png">    </p:cNvPr>
+          <p:cNvPicPr>
+            <a:picLocks noChangeAspect="1"/>
+          </p:cNvPicPr>
+          <p:nvPr/>
+        </p:nvPicPr>
+        <p:blipFill>
+          <a:blip r:embed="rId3"/>
+          <a:stretch>
+            <a:fillRect/>
+          </a:stretch>
+        </p:blipFill>
+        <p:spPr>
+          <a:xfrm>
+            <a:off x="3977640" y="8686800"/>
+            <a:ext cx="256032" cy="256032"/>
+          </a:xfrm>
+          <a:prstGeom prst="rect">
+            <a:avLst/>
+          </a:prstGeom>
+        </p:spPr>
+      </p:pic>
+      <p:sp>
+        <p:nvSpPr>
+          <p:cNvPr id="60" name="Text 55"/>
+          <p:cNvSpPr/>
+          <p:nvPr/>
+        </p:nvSpPr>
+        <p:spPr>
+          <a:xfrm>
+            <a:off x="4288536" y="8668512"/>
+            <a:ext cx="2843784" cy="292608"/>
+          </a:xfrm>
+          <a:prstGeom prst="rect">
+            <a:avLst/>
+          </a:prstGeom>
+          <a:noFill/>
+          <a:ln/>
+        </p:spPr>
+        <p:txBody>
+          <a:bodyPr wrap="square" lIns="0" tIns="0" rIns="0" bIns="0" rtlCol="0" anchor="ctr"/>
+          <a:lstStyle/>
+          <a:p>
+            <a:pPr indent="0" marL="0">
+              <a:buNone/>
+            </a:pPr>
+            <a:r>
+              <a:rPr lang="en-US" sz="1300" b="1" dirty="0">
+                <a:solidFill>
+                  <a:srgbClr val="0C2A3D"/>
                 </a:solidFill>
                 <a:latin typeface="Calibri" pitchFamily="34" charset="0"/>
                 <a:ea typeface="Calibri" pitchFamily="34" charset="-122"/>
                 <a:cs typeface="Calibri" pitchFamily="34" charset="-120"/>
               </a:rPr>
-              <a:t>Limited cohort · Sign in with the Gmail Allan adds you under</a:t>
-            </a:r>
-            <a:endParaRPr lang="en-US" sz="950" dirty="0"/>
-          </a:p>
-        </p:txBody>
-      </p:sp>
-      <p:sp>
-        <p:nvSpPr>
-          <p:cNvPr id="63" name="Shape 59"/>
+              <a:t>+256 705 571 443</a:t>
+            </a:r>
+            <a:endParaRPr lang="en-US" sz="1300" dirty="0"/>
+          </a:p>
+        </p:txBody>
+      </p:sp>
+      <p:sp>
+        <p:nvSpPr>
+          <p:cNvPr id="61" name="Text 56"/>
+          <p:cNvSpPr/>
+          <p:nvPr/>
+        </p:nvSpPr>
+        <p:spPr>
+          <a:xfrm>
+            <a:off x="457200" y="9015984"/>
+            <a:ext cx="6858000" cy="201168"/>
+          </a:xfrm>
+          <a:prstGeom prst="rect">
+            <a:avLst/>
+          </a:prstGeom>
+          <a:noFill/>
+          <a:ln/>
+        </p:spPr>
+        <p:txBody>
+          <a:bodyPr wrap="square" lIns="0" tIns="0" rIns="0" bIns="0" rtlCol="0" anchor="ctr"/>
+          <a:lstStyle/>
+          <a:p>
+            <a:pPr indent="0" marL="0">
+              <a:buNone/>
+            </a:pPr>
+            <a:r>
+              <a:rPr lang="en-US" sz="1050" i="1" dirty="0">
+                <a:solidFill>
+                  <a:srgbClr val="345671"/>
+                </a:solidFill>
+                <a:latin typeface="Calibri" pitchFamily="34" charset="0"/>
+                <a:ea typeface="Calibri" pitchFamily="34" charset="-122"/>
+                <a:cs typeface="Calibri" pitchFamily="34" charset="-120"/>
+              </a:rPr>
+              <a:t>Once enrolled, you'll be granted access to all course materials at:</a:t>
+            </a:r>
+            <a:endParaRPr lang="en-US" sz="1050" dirty="0"/>
+          </a:p>
+        </p:txBody>
+      </p:sp>
+      <p:sp>
+        <p:nvSpPr>
+          <p:cNvPr id="62" name="Text 57"/>
+          <p:cNvSpPr/>
+          <p:nvPr/>
+        </p:nvSpPr>
+        <p:spPr>
+          <a:xfrm>
+            <a:off x="457200" y="9217152"/>
+            <a:ext cx="6858000" cy="402336"/>
+          </a:xfrm>
+          <a:prstGeom prst="rect">
+            <a:avLst/>
+          </a:prstGeom>
+          <a:noFill/>
+          <a:ln/>
+        </p:spPr>
+        <p:txBody>
+          <a:bodyPr wrap="square" lIns="0" tIns="0" rIns="0" bIns="0" rtlCol="0" anchor="ctr"/>
+          <a:lstStyle/>
+          <a:p>
+            <a:pPr indent="0" marL="0">
+              <a:buNone/>
+            </a:pPr>
+            <a:r>
+              <a:rPr lang="en-US" sz="2200" b="1" dirty="0">
+                <a:solidFill>
+                  <a:srgbClr val="D97706"/>
+                </a:solidFill>
+                <a:latin typeface="Arial Black" pitchFamily="34" charset="0"/>
+                <a:ea typeface="Arial Black" pitchFamily="34" charset="-122"/>
+                <a:cs typeface="Arial Black" pitchFamily="34" charset="-120"/>
+              </a:rPr>
+              <a:t>bakesiga.github.io/usmle-dashboard</a:t>
+            </a:r>
+            <a:endParaRPr lang="en-US" sz="2200" dirty="0"/>
+          </a:p>
+        </p:txBody>
+      </p:sp>
+      <p:sp>
+        <p:nvSpPr>
+          <p:cNvPr id="63" name="Shape 58"/>
           <p:cNvSpPr/>
           <p:nvPr/>
         </p:nvSpPr>
@@ -2970,7 +2969,7 @@
       </p:sp>
       <p:sp>
         <p:nvSpPr>
-          <p:cNvPr id="64" name="Shape 60"/>
+          <p:cNvPr id="64" name="Shape 59"/>
           <p:cNvSpPr/>
           <p:nvPr/>
         </p:nvSpPr>

--- a/outputs/flyers/USMLE_Step2_Flyer.pptx
+++ b/outputs/flyers/USMLE_Step2_Flyer.pptx
@@ -2770,8 +2770,8 @@
         </p:nvSpPr>
         <p:spPr>
           <a:xfrm>
-            <a:off x="768096" y="8668512"/>
-            <a:ext cx="3026664" cy="292608"/>
+            <a:off x="749808" y="8668512"/>
+            <a:ext cx="1883664" cy="292608"/>
           </a:xfrm>
           <a:prstGeom prst="rect">
             <a:avLst/>
@@ -2787,7 +2787,7 @@
               <a:buNone/>
             </a:pPr>
             <a:r>
-              <a:rPr lang="en-US" sz="1300" b="1" dirty="0">
+              <a:rPr lang="en-US" sz="1200" b="1" dirty="0">
                 <a:solidFill>
                   <a:srgbClr val="0C2A3D"/>
                 </a:solidFill>
@@ -2797,7 +2797,7 @@
               </a:rPr>
               <a:t>allanbakesiga@gmail.com</a:t>
             </a:r>
-            <a:endParaRPr lang="en-US" sz="1300" dirty="0"/>
+            <a:endParaRPr lang="en-US" sz="1200" dirty="0"/>
           </a:p>
         </p:txBody>
       </p:sp>
@@ -2817,7 +2817,7 @@
         </p:blipFill>
         <p:spPr>
           <a:xfrm>
-            <a:off x="3977640" y="8686800"/>
+            <a:off x="2798064" y="8686800"/>
             <a:ext cx="256032" cy="256032"/>
           </a:xfrm>
           <a:prstGeom prst="rect">
@@ -2833,8 +2833,8 @@
         </p:nvSpPr>
         <p:spPr>
           <a:xfrm>
-            <a:off x="4288536" y="8668512"/>
-            <a:ext cx="2843784" cy="292608"/>
+            <a:off x="3108960" y="8668512"/>
+            <a:ext cx="1865376" cy="292608"/>
           </a:xfrm>
           <a:prstGeom prst="rect">
             <a:avLst/>
@@ -2850,7 +2850,7 @@
               <a:buNone/>
             </a:pPr>
             <a:r>
-              <a:rPr lang="en-US" sz="1300" b="1" dirty="0">
+              <a:rPr lang="en-US" sz="1200" b="1" dirty="0">
                 <a:solidFill>
                   <a:srgbClr val="0C2A3D"/>
                 </a:solidFill>
@@ -2860,20 +2860,44 @@
               </a:rPr>
               <a:t>+256 705 571 443</a:t>
             </a:r>
-            <a:endParaRPr lang="en-US" sz="1300" dirty="0"/>
-          </a:p>
-        </p:txBody>
-      </p:sp>
-      <p:sp>
-        <p:nvSpPr>
-          <p:cNvPr id="61" name="Text 56"/>
-          <p:cNvSpPr/>
-          <p:nvPr/>
-        </p:nvSpPr>
-        <p:spPr>
-          <a:xfrm>
-            <a:off x="457200" y="9015984"/>
-            <a:ext cx="6858000" cy="201168"/>
+            <a:endParaRPr lang="en-US" sz="1200" dirty="0"/>
+          </a:p>
+        </p:txBody>
+      </p:sp>
+      <p:pic>
+        <p:nvPicPr>
+          <p:cNvPr id="61" name="Image 3" descr="phone-amber.png">    </p:cNvPr>
+          <p:cNvPicPr>
+            <a:picLocks noChangeAspect="1"/>
+          </p:cNvPicPr>
+          <p:nvPr/>
+        </p:nvPicPr>
+        <p:blipFill>
+          <a:blip r:embed="rId4"/>
+          <a:stretch>
+            <a:fillRect/>
+          </a:stretch>
+        </p:blipFill>
+        <p:spPr>
+          <a:xfrm>
+            <a:off x="5138928" y="8705088"/>
+            <a:ext cx="237744" cy="237744"/>
+          </a:xfrm>
+          <a:prstGeom prst="rect">
+            <a:avLst/>
+          </a:prstGeom>
+        </p:spPr>
+      </p:pic>
+      <p:sp>
+        <p:nvSpPr>
+          <p:cNvPr id="62" name="Text 56"/>
+          <p:cNvSpPr/>
+          <p:nvPr/>
+        </p:nvSpPr>
+        <p:spPr>
+          <a:xfrm>
+            <a:off x="5431536" y="8668512"/>
+            <a:ext cx="1883664" cy="292608"/>
           </a:xfrm>
           <a:prstGeom prst="rect">
             <a:avLst/>
@@ -2889,14 +2913,53 @@
               <a:buNone/>
             </a:pPr>
             <a:r>
-              <a:rPr lang="en-US" sz="1050" i="1" dirty="0">
-                <a:solidFill>
-                  <a:srgbClr val="345671"/>
+              <a:rPr lang="en-US" sz="1200" b="1" dirty="0">
+                <a:solidFill>
+                  <a:srgbClr val="0C2A3D"/>
                 </a:solidFill>
                 <a:latin typeface="Calibri" pitchFamily="34" charset="0"/>
                 <a:ea typeface="Calibri" pitchFamily="34" charset="-122"/>
                 <a:cs typeface="Calibri" pitchFamily="34" charset="-120"/>
               </a:rPr>
+              <a:t>+1 984 710 2902</a:t>
+            </a:r>
+            <a:endParaRPr lang="en-US" sz="1200" dirty="0"/>
+          </a:p>
+        </p:txBody>
+      </p:sp>
+      <p:sp>
+        <p:nvSpPr>
+          <p:cNvPr id="63" name="Text 57"/>
+          <p:cNvSpPr/>
+          <p:nvPr/>
+        </p:nvSpPr>
+        <p:spPr>
+          <a:xfrm>
+            <a:off x="457200" y="9015984"/>
+            <a:ext cx="6858000" cy="201168"/>
+          </a:xfrm>
+          <a:prstGeom prst="rect">
+            <a:avLst/>
+          </a:prstGeom>
+          <a:noFill/>
+          <a:ln/>
+        </p:spPr>
+        <p:txBody>
+          <a:bodyPr wrap="square" lIns="0" tIns="0" rIns="0" bIns="0" rtlCol="0" anchor="ctr"/>
+          <a:lstStyle/>
+          <a:p>
+            <a:pPr indent="0" marL="0">
+              <a:buNone/>
+            </a:pPr>
+            <a:r>
+              <a:rPr lang="en-US" sz="1050" i="1" dirty="0">
+                <a:solidFill>
+                  <a:srgbClr val="345671"/>
+                </a:solidFill>
+                <a:latin typeface="Calibri" pitchFamily="34" charset="0"/>
+                <a:ea typeface="Calibri" pitchFamily="34" charset="-122"/>
+                <a:cs typeface="Calibri" pitchFamily="34" charset="-120"/>
+              </a:rPr>
               <a:t>Once enrolled, you'll be granted access to all course materials at:</a:t>
             </a:r>
             <a:endParaRPr lang="en-US" sz="1050" dirty="0"/>
@@ -2905,7 +2968,7 @@
       </p:sp>
       <p:sp>
         <p:nvSpPr>
-          <p:cNvPr id="62" name="Text 57"/>
+          <p:cNvPr id="64" name="Text 58"/>
           <p:cNvSpPr/>
           <p:nvPr/>
         </p:nvSpPr>
@@ -2944,7 +3007,7 @@
       </p:sp>
       <p:sp>
         <p:nvSpPr>
-          <p:cNvPr id="63" name="Shape 58"/>
+          <p:cNvPr id="65" name="Shape 59"/>
           <p:cNvSpPr/>
           <p:nvPr/>
         </p:nvSpPr>
@@ -2969,7 +3032,7 @@
       </p:sp>
       <p:sp>
         <p:nvSpPr>
-          <p:cNvPr id="64" name="Shape 59"/>
+          <p:cNvPr id="66" name="Shape 60"/>
           <p:cNvSpPr/>
           <p:nvPr/>
         </p:nvSpPr>

--- a/outputs/flyers/USMLE_Step2_Flyer.pptx
+++ b/outputs/flyers/USMLE_Step2_Flyer.pptx
@@ -2720,7 +2720,7 @@
           <a:bodyPr wrap="square" lIns="0" tIns="0" rIns="0" bIns="0" rtlCol="0" anchor="ctr"/>
           <a:lstStyle/>
           <a:p>
-            <a:pPr indent="0" marL="0">
+            <a:pPr algn="ctr" indent="0" marL="0">
               <a:buNone/>
             </a:pPr>
             <a:r>
@@ -2754,7 +2754,7 @@
         </p:blipFill>
         <p:spPr>
           <a:xfrm>
-            <a:off x="457200" y="8705088"/>
+            <a:off x="457200" y="8695944"/>
             <a:ext cx="237744" cy="237744"/>
           </a:xfrm>
           <a:prstGeom prst="rect">
@@ -2770,20 +2770,20 @@
         </p:nvSpPr>
         <p:spPr>
           <a:xfrm>
-            <a:off x="749808" y="8668512"/>
-            <a:ext cx="1883664" cy="292608"/>
-          </a:xfrm>
-          <a:prstGeom prst="rect">
-            <a:avLst/>
-          </a:prstGeom>
-          <a:noFill/>
-          <a:ln/>
-        </p:spPr>
-        <p:txBody>
-          <a:bodyPr wrap="square" lIns="0" tIns="0" rIns="0" bIns="0" rtlCol="0" anchor="ctr"/>
-          <a:lstStyle/>
-          <a:p>
-            <a:pPr indent="0" marL="0">
+            <a:off x="768096" y="8668512"/>
+            <a:ext cx="2026310" cy="292608"/>
+          </a:xfrm>
+          <a:prstGeom prst="rect">
+            <a:avLst/>
+          </a:prstGeom>
+          <a:noFill/>
+          <a:ln/>
+        </p:spPr>
+        <p:txBody>
+          <a:bodyPr wrap="square" lIns="0" tIns="0" rIns="0" bIns="0" rtlCol="0" anchor="ctr"/>
+          <a:lstStyle/>
+          <a:p>
+            <a:pPr algn="l" indent="0" marL="0">
               <a:buNone/>
             </a:pPr>
             <a:r>
@@ -2817,7 +2817,7 @@
         </p:blipFill>
         <p:spPr>
           <a:xfrm>
-            <a:off x="2798064" y="8686800"/>
+            <a:off x="3048610" y="8686800"/>
             <a:ext cx="256032" cy="256032"/>
           </a:xfrm>
           <a:prstGeom prst="rect">
@@ -2833,20 +2833,20 @@
         </p:nvSpPr>
         <p:spPr>
           <a:xfrm>
-            <a:off x="3108960" y="8668512"/>
-            <a:ext cx="1865376" cy="292608"/>
-          </a:xfrm>
-          <a:prstGeom prst="rect">
-            <a:avLst/>
-          </a:prstGeom>
-          <a:noFill/>
-          <a:ln/>
-        </p:spPr>
-        <p:txBody>
-          <a:bodyPr wrap="square" lIns="0" tIns="0" rIns="0" bIns="0" rtlCol="0" anchor="ctr"/>
-          <a:lstStyle/>
-          <a:p>
-            <a:pPr indent="0" marL="0">
+            <a:off x="3377794" y="8668512"/>
+            <a:ext cx="1437437" cy="292608"/>
+          </a:xfrm>
+          <a:prstGeom prst="rect">
+            <a:avLst/>
+          </a:prstGeom>
+          <a:noFill/>
+          <a:ln/>
+        </p:spPr>
+        <p:txBody>
+          <a:bodyPr wrap="square" lIns="0" tIns="0" rIns="0" bIns="0" rtlCol="0" anchor="ctr"/>
+          <a:lstStyle/>
+          <a:p>
+            <a:pPr algn="l" indent="0" marL="0">
               <a:buNone/>
             </a:pPr>
             <a:r>
@@ -2880,7 +2880,7 @@
         </p:blipFill>
         <p:spPr>
           <a:xfrm>
-            <a:off x="5138928" y="8705088"/>
+            <a:off x="5440680" y="8695944"/>
             <a:ext cx="237744" cy="237744"/>
           </a:xfrm>
           <a:prstGeom prst="rect">
@@ -2896,20 +2896,20 @@
         </p:nvSpPr>
         <p:spPr>
           <a:xfrm>
-            <a:off x="5431536" y="8668512"/>
-            <a:ext cx="1883664" cy="292608"/>
-          </a:xfrm>
-          <a:prstGeom prst="rect">
-            <a:avLst/>
-          </a:prstGeom>
-          <a:noFill/>
-          <a:ln/>
-        </p:spPr>
-        <p:txBody>
-          <a:bodyPr wrap="square" lIns="0" tIns="0" rIns="0" bIns="0" rtlCol="0" anchor="ctr"/>
-          <a:lstStyle/>
-          <a:p>
-            <a:pPr indent="0" marL="0">
+            <a:off x="5751576" y="8668512"/>
+            <a:ext cx="1353312" cy="292608"/>
+          </a:xfrm>
+          <a:prstGeom prst="rect">
+            <a:avLst/>
+          </a:prstGeom>
+          <a:noFill/>
+          <a:ln/>
+        </p:spPr>
+        <p:txBody>
+          <a:bodyPr wrap="square" lIns="0" tIns="0" rIns="0" bIns="0" rtlCol="0" anchor="ctr"/>
+          <a:lstStyle/>
+          <a:p>
+            <a:pPr algn="l" indent="0" marL="0">
               <a:buNone/>
             </a:pPr>
             <a:r>

--- a/outputs/flyers/USMLE_Step2_Flyer.pptx
+++ b/outputs/flyers/USMLE_Step2_Flyer.pptx
@@ -2720,7 +2720,7 @@
           <a:bodyPr wrap="square" lIns="0" tIns="0" rIns="0" bIns="0" rtlCol="0" anchor="ctr"/>
           <a:lstStyle/>
           <a:p>
-            <a:pPr algn="ctr" indent="0" marL="0">
+            <a:pPr indent="0" marL="0">
               <a:buNone/>
             </a:pPr>
             <a:r>

--- a/outputs/flyers/USMLE_Step2_Flyer.pptx
+++ b/outputs/flyers/USMLE_Step2_Flyer.pptx
@@ -2732,7 +2732,7 @@
                 <a:ea typeface="Calibri" pitchFamily="34" charset="-122"/>
                 <a:cs typeface="Calibri" pitchFamily="34" charset="-120"/>
               </a:rPr>
-              <a:t>TO SIGN UP, CONTACT ALLAN</a:t>
+              <a:t>TO SIGN UP, CONTACT ALLAN ON:</a:t>
             </a:r>
             <a:endParaRPr lang="en-US" sz="1100" dirty="0"/>
           </a:p>

--- a/outputs/flyers/USMLE_Step2_Flyer.pptx
+++ b/outputs/flyers/USMLE_Step2_Flyer.pptx
@@ -2249,7 +2249,7 @@
                 <a:ea typeface="Calibri" pitchFamily="34" charset="-122"/>
                 <a:cs typeface="Calibri" pitchFamily="34" charset="-120"/>
               </a:rPr>
-              <a:t>Textbook + Qbank</a:t>
+              <a:t>Textbook, Qbank &amp; more</a:t>
             </a:r>
             <a:endParaRPr lang="en-US" sz="1500" dirty="0"/>
           </a:p>
@@ -2288,7 +2288,7 @@
                 <a:ea typeface="Calibri" pitchFamily="34" charset="-122"/>
                 <a:cs typeface="Calibri" pitchFamily="34" charset="-120"/>
               </a:rPr>
-              <a:t>Full review of the recommended textbook plus USMLE-style questions from the recommended Qbank.</a:t>
+              <a:t>Full review of the high-yield USMLE resources (textbook, Qbank, and curated supplements), with USMLE-style practice questions woven throughout.</a:t>
             </a:r>
             <a:endParaRPr lang="en-US" sz="1150" dirty="0"/>
           </a:p>

--- a/outputs/flyers/USMLE_Step2_Flyer.pptx
+++ b/outputs/flyers/USMLE_Step2_Flyer.pptx
@@ -2288,7 +2288,7 @@
                 <a:ea typeface="Calibri" pitchFamily="34" charset="-122"/>
                 <a:cs typeface="Calibri" pitchFamily="34" charset="-120"/>
               </a:rPr>
-              <a:t>Full review of the high-yield USMLE resources (textbook, Qbank, and curated supplements), with USMLE-style practice questions woven throughout.</a:t>
+              <a:t>Full review of textbook, Qbank, and high-yield supplements, with practice questions in every session.</a:t>
             </a:r>
             <a:endParaRPr lang="en-US" sz="1150" dirty="0"/>
           </a:p>

--- a/outputs/flyers/USMLE_Step2_Flyer.pptx
+++ b/outputs/flyers/USMLE_Step2_Flyer.pptx
@@ -1206,7 +1206,7 @@
         </p:nvSpPr>
         <p:spPr>
           <a:xfrm>
-            <a:off x="457200" y="1965960"/>
+            <a:off x="457200" y="1874520"/>
             <a:ext cx="6858000" cy="1005840"/>
           </a:xfrm>
           <a:prstGeom prst="rect">
@@ -1231,7 +1231,7 @@
         </p:nvSpPr>
         <p:spPr>
           <a:xfrm>
-            <a:off x="603504" y="2093976"/>
+            <a:off x="603504" y="2002536"/>
             <a:ext cx="786384" cy="786384"/>
           </a:xfrm>
           <a:prstGeom prst="ellipse">
@@ -1263,7 +1263,7 @@
         </p:blipFill>
         <p:spPr>
           <a:xfrm>
-            <a:off x="640080" y="2130552"/>
+            <a:off x="640080" y="2039112"/>
             <a:ext cx="713232" cy="713232"/>
           </a:xfrm>
           <a:prstGeom prst="ellipse">
@@ -1279,7 +1279,7 @@
         </p:nvSpPr>
         <p:spPr>
           <a:xfrm>
-            <a:off x="1508760" y="2057400"/>
+            <a:off x="1508760" y="1965960"/>
             <a:ext cx="5760720" cy="329184"/>
           </a:xfrm>
           <a:prstGeom prst="rect">
@@ -1318,7 +1318,7 @@
         </p:nvSpPr>
         <p:spPr>
           <a:xfrm>
-            <a:off x="1508760" y="2386584"/>
+            <a:off x="1508760" y="2295144"/>
             <a:ext cx="5760720" cy="274320"/>
           </a:xfrm>
           <a:prstGeom prst="rect">
@@ -1357,7 +1357,7 @@
         </p:nvSpPr>
         <p:spPr>
           <a:xfrm>
-            <a:off x="1508760" y="2660904"/>
+            <a:off x="1508760" y="2569464"/>
             <a:ext cx="5760720" cy="256032"/>
           </a:xfrm>
           <a:prstGeom prst="rect">
@@ -1396,7 +1396,7 @@
         </p:nvSpPr>
         <p:spPr>
           <a:xfrm>
-            <a:off x="457200" y="3108960"/>
+            <a:off x="457200" y="3017520"/>
             <a:ext cx="2164080" cy="960120"/>
           </a:xfrm>
           <a:prstGeom prst="rect">
@@ -1421,7 +1421,7 @@
         </p:nvSpPr>
         <p:spPr>
           <a:xfrm>
-            <a:off x="457200" y="3218688"/>
+            <a:off x="457200" y="3127248"/>
             <a:ext cx="2164080" cy="457200"/>
           </a:xfrm>
           <a:prstGeom prst="rect">
@@ -1460,7 +1460,7 @@
         </p:nvSpPr>
         <p:spPr>
           <a:xfrm>
-            <a:off x="457200" y="3675888"/>
+            <a:off x="457200" y="3584448"/>
             <a:ext cx="2164080" cy="320040"/>
           </a:xfrm>
           <a:prstGeom prst="rect">
@@ -1499,7 +1499,7 @@
         </p:nvSpPr>
         <p:spPr>
           <a:xfrm>
-            <a:off x="2804160" y="3108960"/>
+            <a:off x="2804160" y="3017520"/>
             <a:ext cx="2164080" cy="960120"/>
           </a:xfrm>
           <a:prstGeom prst="rect">
@@ -1524,7 +1524,7 @@
         </p:nvSpPr>
         <p:spPr>
           <a:xfrm>
-            <a:off x="2804160" y="3218688"/>
+            <a:off x="2804160" y="3127248"/>
             <a:ext cx="2164080" cy="457200"/>
           </a:xfrm>
           <a:prstGeom prst="rect">
@@ -1563,7 +1563,7 @@
         </p:nvSpPr>
         <p:spPr>
           <a:xfrm>
-            <a:off x="2804160" y="3675888"/>
+            <a:off x="2804160" y="3584448"/>
             <a:ext cx="2164080" cy="320040"/>
           </a:xfrm>
           <a:prstGeom prst="rect">
@@ -1602,7 +1602,7 @@
         </p:nvSpPr>
         <p:spPr>
           <a:xfrm>
-            <a:off x="5151120" y="3108960"/>
+            <a:off x="5151120" y="3017520"/>
             <a:ext cx="2164080" cy="960120"/>
           </a:xfrm>
           <a:prstGeom prst="rect">
@@ -1627,7 +1627,7 @@
         </p:nvSpPr>
         <p:spPr>
           <a:xfrm>
-            <a:off x="5151120" y="3218688"/>
+            <a:off x="5151120" y="3127248"/>
             <a:ext cx="2164080" cy="457200"/>
           </a:xfrm>
           <a:prstGeom prst="rect">
@@ -1666,7 +1666,7 @@
         </p:nvSpPr>
         <p:spPr>
           <a:xfrm>
-            <a:off x="5151120" y="3675888"/>
+            <a:off x="5151120" y="3584448"/>
             <a:ext cx="2164080" cy="320040"/>
           </a:xfrm>
           <a:prstGeom prst="rect">
@@ -1705,7 +1705,7 @@
         </p:nvSpPr>
         <p:spPr>
           <a:xfrm>
-            <a:off x="457200" y="4160520"/>
+            <a:off x="457200" y="4069080"/>
             <a:ext cx="3314700" cy="1097280"/>
           </a:xfrm>
           <a:prstGeom prst="rect">
@@ -1737,7 +1737,7 @@
         </p:nvSpPr>
         <p:spPr>
           <a:xfrm>
-            <a:off x="457200" y="4160520"/>
+            <a:off x="457200" y="4069080"/>
             <a:ext cx="91440" cy="1097280"/>
           </a:xfrm>
           <a:prstGeom prst="rect">
@@ -1762,7 +1762,7 @@
         </p:nvSpPr>
         <p:spPr>
           <a:xfrm>
-            <a:off x="685800" y="4361688"/>
+            <a:off x="685800" y="4270248"/>
             <a:ext cx="438912" cy="438912"/>
           </a:xfrm>
           <a:prstGeom prst="ellipse">
@@ -1787,7 +1787,7 @@
         </p:nvSpPr>
         <p:spPr>
           <a:xfrm>
-            <a:off x="685800" y="4361688"/>
+            <a:off x="685800" y="4270248"/>
             <a:ext cx="438912" cy="438912"/>
           </a:xfrm>
           <a:prstGeom prst="rect">
@@ -1826,7 +1826,7 @@
         </p:nvSpPr>
         <p:spPr>
           <a:xfrm>
-            <a:off x="1207008" y="4325112"/>
+            <a:off x="1207008" y="4233672"/>
             <a:ext cx="2473452" cy="310896"/>
           </a:xfrm>
           <a:prstGeom prst="rect">
@@ -1865,7 +1865,7 @@
         </p:nvSpPr>
         <p:spPr>
           <a:xfrm>
-            <a:off x="1207008" y="4654296"/>
+            <a:off x="1207008" y="4562856"/>
             <a:ext cx="2473452" cy="548640"/>
           </a:xfrm>
           <a:prstGeom prst="rect">
@@ -1904,7 +1904,7 @@
         </p:nvSpPr>
         <p:spPr>
           <a:xfrm>
-            <a:off x="4000500" y="4160520"/>
+            <a:off x="4000500" y="4069080"/>
             <a:ext cx="3314700" cy="1097280"/>
           </a:xfrm>
           <a:prstGeom prst="rect">
@@ -1936,7 +1936,7 @@
         </p:nvSpPr>
         <p:spPr>
           <a:xfrm>
-            <a:off x="4000500" y="4160520"/>
+            <a:off x="4000500" y="4069080"/>
             <a:ext cx="91440" cy="1097280"/>
           </a:xfrm>
           <a:prstGeom prst="rect">
@@ -1961,7 +1961,7 @@
         </p:nvSpPr>
         <p:spPr>
           <a:xfrm>
-            <a:off x="4229100" y="4361688"/>
+            <a:off x="4229100" y="4270248"/>
             <a:ext cx="438912" cy="438912"/>
           </a:xfrm>
           <a:prstGeom prst="ellipse">
@@ -1986,7 +1986,7 @@
         </p:nvSpPr>
         <p:spPr>
           <a:xfrm>
-            <a:off x="4229100" y="4361688"/>
+            <a:off x="4229100" y="4270248"/>
             <a:ext cx="438912" cy="438912"/>
           </a:xfrm>
           <a:prstGeom prst="rect">
@@ -2025,7 +2025,7 @@
         </p:nvSpPr>
         <p:spPr>
           <a:xfrm>
-            <a:off x="4750308" y="4325112"/>
+            <a:off x="4750308" y="4233672"/>
             <a:ext cx="2473452" cy="310896"/>
           </a:xfrm>
           <a:prstGeom prst="rect">
@@ -2064,7 +2064,7 @@
         </p:nvSpPr>
         <p:spPr>
           <a:xfrm>
-            <a:off x="4750308" y="4654296"/>
+            <a:off x="4750308" y="4562856"/>
             <a:ext cx="2473452" cy="548640"/>
           </a:xfrm>
           <a:prstGeom prst="rect">
@@ -2103,7 +2103,7 @@
         </p:nvSpPr>
         <p:spPr>
           <a:xfrm>
-            <a:off x="457200" y="5422392"/>
+            <a:off x="457200" y="5330952"/>
             <a:ext cx="3314700" cy="1097280"/>
           </a:xfrm>
           <a:prstGeom prst="rect">
@@ -2135,7 +2135,7 @@
         </p:nvSpPr>
         <p:spPr>
           <a:xfrm>
-            <a:off x="457200" y="5422392"/>
+            <a:off x="457200" y="5330952"/>
             <a:ext cx="91440" cy="1097280"/>
           </a:xfrm>
           <a:prstGeom prst="rect">
@@ -2160,7 +2160,7 @@
         </p:nvSpPr>
         <p:spPr>
           <a:xfrm>
-            <a:off x="685800" y="5623560"/>
+            <a:off x="685800" y="5532120"/>
             <a:ext cx="438912" cy="438912"/>
           </a:xfrm>
           <a:prstGeom prst="ellipse">
@@ -2185,7 +2185,7 @@
         </p:nvSpPr>
         <p:spPr>
           <a:xfrm>
-            <a:off x="685800" y="5623560"/>
+            <a:off x="685800" y="5532120"/>
             <a:ext cx="438912" cy="438912"/>
           </a:xfrm>
           <a:prstGeom prst="rect">
@@ -2224,7 +2224,7 @@
         </p:nvSpPr>
         <p:spPr>
           <a:xfrm>
-            <a:off x="1207008" y="5586984"/>
+            <a:off x="1207008" y="5495544"/>
             <a:ext cx="2473452" cy="310896"/>
           </a:xfrm>
           <a:prstGeom prst="rect">
@@ -2263,7 +2263,7 @@
         </p:nvSpPr>
         <p:spPr>
           <a:xfrm>
-            <a:off x="1207008" y="5916168"/>
+            <a:off x="1207008" y="5824728"/>
             <a:ext cx="2473452" cy="548640"/>
           </a:xfrm>
           <a:prstGeom prst="rect">
@@ -2302,7 +2302,7 @@
         </p:nvSpPr>
         <p:spPr>
           <a:xfrm>
-            <a:off x="4000500" y="5422392"/>
+            <a:off x="4000500" y="5330952"/>
             <a:ext cx="3314700" cy="1097280"/>
           </a:xfrm>
           <a:prstGeom prst="rect">
@@ -2334,7 +2334,7 @@
         </p:nvSpPr>
         <p:spPr>
           <a:xfrm>
-            <a:off x="4000500" y="5422392"/>
+            <a:off x="4000500" y="5330952"/>
             <a:ext cx="91440" cy="1097280"/>
           </a:xfrm>
           <a:prstGeom prst="rect">
@@ -2359,7 +2359,7 @@
         </p:nvSpPr>
         <p:spPr>
           <a:xfrm>
-            <a:off x="4229100" y="5623560"/>
+            <a:off x="4229100" y="5532120"/>
             <a:ext cx="438912" cy="438912"/>
           </a:xfrm>
           <a:prstGeom prst="ellipse">
@@ -2384,7 +2384,7 @@
         </p:nvSpPr>
         <p:spPr>
           <a:xfrm>
-            <a:off x="4229100" y="5623560"/>
+            <a:off x="4229100" y="5532120"/>
             <a:ext cx="438912" cy="438912"/>
           </a:xfrm>
           <a:prstGeom prst="rect">
@@ -2423,7 +2423,7 @@
         </p:nvSpPr>
         <p:spPr>
           <a:xfrm>
-            <a:off x="4750308" y="5586984"/>
+            <a:off x="4750308" y="5495544"/>
             <a:ext cx="2473452" cy="310896"/>
           </a:xfrm>
           <a:prstGeom prst="rect">
@@ -2462,7 +2462,7 @@
         </p:nvSpPr>
         <p:spPr>
           <a:xfrm>
-            <a:off x="4750308" y="5916168"/>
+            <a:off x="4750308" y="5824728"/>
             <a:ext cx="2473452" cy="548640"/>
           </a:xfrm>
           <a:prstGeom prst="rect">
@@ -2501,7 +2501,7 @@
         </p:nvSpPr>
         <p:spPr>
           <a:xfrm>
-            <a:off x="457200" y="6583680"/>
+            <a:off x="457200" y="6492240"/>
             <a:ext cx="6858000" cy="274320"/>
           </a:xfrm>
           <a:prstGeom prst="rect">
@@ -2540,7 +2540,7 @@
         </p:nvSpPr>
         <p:spPr>
           <a:xfrm>
-            <a:off x="457200" y="6894576"/>
+            <a:off x="457200" y="6803136"/>
             <a:ext cx="6858000" cy="502920"/>
           </a:xfrm>
           <a:prstGeom prst="rect">
@@ -2579,8 +2579,8 @@
         </p:nvSpPr>
         <p:spPr>
           <a:xfrm>
-            <a:off x="457200" y="7443216"/>
-            <a:ext cx="6858000" cy="777240"/>
+            <a:off x="457200" y="7351776"/>
+            <a:ext cx="6858000" cy="731520"/>
           </a:xfrm>
           <a:prstGeom prst="rect">
             <a:avLst/>
@@ -2604,8 +2604,8 @@
         </p:nvSpPr>
         <p:spPr>
           <a:xfrm>
-            <a:off x="457200" y="7443216"/>
-            <a:ext cx="91440" cy="777240"/>
+            <a:off x="457200" y="7351776"/>
+            <a:ext cx="91440" cy="731520"/>
           </a:xfrm>
           <a:prstGeom prst="rect">
             <a:avLst/>
@@ -2629,8 +2629,8 @@
         </p:nvSpPr>
         <p:spPr>
           <a:xfrm>
-            <a:off x="731520" y="7516368"/>
-            <a:ext cx="6492240" cy="274320"/>
+            <a:off x="731520" y="7424928"/>
+            <a:ext cx="6492240" cy="256032"/>
           </a:xfrm>
           <a:prstGeom prst="rect">
             <a:avLst/>
@@ -2668,8 +2668,8 @@
         </p:nvSpPr>
         <p:spPr>
           <a:xfrm>
-            <a:off x="731520" y="7790688"/>
-            <a:ext cx="6492240" cy="384048"/>
+            <a:off x="731520" y="7680960"/>
+            <a:ext cx="6492240" cy="365760"/>
           </a:xfrm>
           <a:prstGeom prst="rect">
             <a:avLst/>
@@ -2707,7 +2707,7 @@
         </p:nvSpPr>
         <p:spPr>
           <a:xfrm>
-            <a:off x="457200" y="8449056"/>
+            <a:off x="457200" y="8357616"/>
             <a:ext cx="6858000" cy="201168"/>
           </a:xfrm>
           <a:prstGeom prst="rect">
@@ -2754,7 +2754,7 @@
         </p:blipFill>
         <p:spPr>
           <a:xfrm>
-            <a:off x="457200" y="8695944"/>
+            <a:off x="457200" y="8604504"/>
             <a:ext cx="237744" cy="237744"/>
           </a:xfrm>
           <a:prstGeom prst="rect">
@@ -2770,7 +2770,7 @@
         </p:nvSpPr>
         <p:spPr>
           <a:xfrm>
-            <a:off x="768096" y="8668512"/>
+            <a:off x="768096" y="8577072"/>
             <a:ext cx="2026310" cy="292608"/>
           </a:xfrm>
           <a:prstGeom prst="rect">
@@ -2817,7 +2817,7 @@
         </p:blipFill>
         <p:spPr>
           <a:xfrm>
-            <a:off x="3048610" y="8686800"/>
+            <a:off x="3048610" y="8595360"/>
             <a:ext cx="256032" cy="256032"/>
           </a:xfrm>
           <a:prstGeom prst="rect">
@@ -2833,7 +2833,7 @@
         </p:nvSpPr>
         <p:spPr>
           <a:xfrm>
-            <a:off x="3377794" y="8668512"/>
+            <a:off x="3377794" y="8577072"/>
             <a:ext cx="1437437" cy="292608"/>
           </a:xfrm>
           <a:prstGeom prst="rect">
@@ -2880,7 +2880,7 @@
         </p:blipFill>
         <p:spPr>
           <a:xfrm>
-            <a:off x="5440680" y="8695944"/>
+            <a:off x="5440680" y="8604504"/>
             <a:ext cx="237744" cy="237744"/>
           </a:xfrm>
           <a:prstGeom prst="rect">
@@ -2896,7 +2896,7 @@
         </p:nvSpPr>
         <p:spPr>
           <a:xfrm>
-            <a:off x="5751576" y="8668512"/>
+            <a:off x="5751576" y="8577072"/>
             <a:ext cx="1353312" cy="292608"/>
           </a:xfrm>
           <a:prstGeom prst="rect">
@@ -2935,7 +2935,7 @@
         </p:nvSpPr>
         <p:spPr>
           <a:xfrm>
-            <a:off x="457200" y="9015984"/>
+            <a:off x="457200" y="8924544"/>
             <a:ext cx="6858000" cy="201168"/>
           </a:xfrm>
           <a:prstGeom prst="rect">
@@ -2974,8 +2974,8 @@
         </p:nvSpPr>
         <p:spPr>
           <a:xfrm>
-            <a:off x="457200" y="9217152"/>
-            <a:ext cx="6858000" cy="402336"/>
+            <a:off x="457200" y="9107424"/>
+            <a:ext cx="6858000" cy="365760"/>
           </a:xfrm>
           <a:prstGeom prst="rect">
             <a:avLst/>

--- a/outputs/flyers/USMLE_Step2_Flyer.pptx
+++ b/outputs/flyers/USMLE_Step2_Flyer.pptx
@@ -908,8 +908,8 @@
         </p:nvSpPr>
         <p:spPr>
           <a:xfrm>
-            <a:off x="457200" y="237744"/>
-            <a:ext cx="4457700" cy="219456"/>
+            <a:off x="457200" y="164592"/>
+            <a:ext cx="5394960" cy="310896"/>
           </a:xfrm>
           <a:prstGeom prst="rect">
             <a:avLst/>
@@ -925,7 +925,7 @@
               <a:buNone/>
             </a:pPr>
             <a:r>
-              <a:rPr lang="en-US" sz="1100" b="1" spc="400" kern="0" dirty="0">
+              <a:rPr lang="en-US" sz="1500" b="1" spc="300" kern="0" dirty="0">
                 <a:solidFill>
                   <a:srgbClr val="FFFFFF"/>
                 </a:solidFill>
@@ -933,9 +933,9 @@
                 <a:ea typeface="Calibri" pitchFamily="34" charset="-122"/>
                 <a:cs typeface="Calibri" pitchFamily="34" charset="-120"/>
               </a:rPr>
-              <a:t>Enrolling now · July–October cohort</a:t>
-            </a:r>
-            <a:endParaRPr lang="en-US" sz="1100" dirty="0"/>
+              <a:t>ENROLLING NOW  ·  JULY–OCTOBER COHORT</a:t>
+            </a:r>
+            <a:endParaRPr lang="en-US" sz="1500" dirty="0"/>
           </a:p>
         </p:txBody>
       </p:sp>
@@ -947,7 +947,7 @@
         </p:nvSpPr>
         <p:spPr>
           <a:xfrm>
-            <a:off x="457200" y="457200"/>
+            <a:off x="457200" y="493776"/>
             <a:ext cx="4457700" cy="292608"/>
           </a:xfrm>
           <a:prstGeom prst="rect">
@@ -964,7 +964,7 @@
               <a:buNone/>
             </a:pPr>
             <a:r>
-              <a:rPr lang="en-US" sz="2400" b="1" spc="800" kern="0" dirty="0">
+              <a:rPr lang="en-US" sz="2200" b="1" spc="800" kern="0" dirty="0">
                 <a:solidFill>
                   <a:srgbClr val="FFFFFF"/>
                 </a:solidFill>
@@ -974,7 +974,7 @@
               </a:rPr>
               <a:t>USMLE</a:t>
             </a:r>
-            <a:endParaRPr lang="en-US" sz="2400" dirty="0"/>
+            <a:endParaRPr lang="en-US" sz="2200" dirty="0"/>
           </a:p>
         </p:txBody>
       </p:sp>
@@ -986,8 +986,8 @@
         </p:nvSpPr>
         <p:spPr>
           <a:xfrm>
-            <a:off x="457200" y="768096"/>
-            <a:ext cx="4457700" cy="777240"/>
+            <a:off x="457200" y="786384"/>
+            <a:ext cx="4457700" cy="749808"/>
           </a:xfrm>
           <a:prstGeom prst="rect">
             <a:avLst/>

--- a/outputs/flyers/USMLE_Step2_Flyer.pptx
+++ b/outputs/flyers/USMLE_Step2_Flyer.pptx
@@ -1167,8 +1167,8 @@
         </p:nvSpPr>
         <p:spPr>
           <a:xfrm>
-            <a:off x="5486400" y="1097280"/>
-            <a:ext cx="1828800" cy="274320"/>
+            <a:off x="5486400" y="1078992"/>
+            <a:ext cx="1828800" cy="310896"/>
           </a:xfrm>
           <a:prstGeom prst="rect">
             <a:avLst/>
@@ -1184,7 +1184,7 @@
               <a:buNone/>
             </a:pPr>
             <a:r>
-              <a:rPr lang="en-US" sz="1050" i="1" dirty="0">
+              <a:rPr lang="en-US" sz="1300" i="1" dirty="0">
                 <a:solidFill>
                   <a:srgbClr val="FFFFFF"/>
                 </a:solidFill>
@@ -1194,7 +1194,7 @@
               </a:rPr>
               <a:t>· daily classes ·</a:t>
             </a:r>
-            <a:endParaRPr lang="en-US" sz="1050" dirty="0"/>
+            <a:endParaRPr lang="en-US" sz="1300" dirty="0"/>
           </a:p>
         </p:txBody>
       </p:sp>

--- a/outputs/flyers/USMLE_Step2_Flyer.pptx
+++ b/outputs/flyers/USMLE_Step2_Flyer.pptx
@@ -2557,15 +2557,29 @@
               <a:buNone/>
             </a:pPr>
             <a:r>
-              <a:rPr lang="en-US" sz="1250" dirty="0">
-                <a:solidFill>
-                  <a:srgbClr val="0C2A3D"/>
+              <a:rPr lang="en-US" sz="1250" b="1" dirty="0">
+                <a:solidFill>
+                  <a:srgbClr val="B45309"/>
                 </a:solidFill>
                 <a:latin typeface="Calibri" pitchFamily="34" charset="0"/>
                 <a:ea typeface="Calibri" pitchFamily="34" charset="-122"/>
                 <a:cs typeface="Calibri" pitchFamily="34" charset="-120"/>
               </a:rPr>
-              <a:t>Internal Medicine  ·  Surgery  ·  OB-GYN  ·  Pediatrics  ·  Psychiatry  ·  Family Medicine  ·  Preventive Medicine  ·  Ethics  ·  Biostatistics  ·  Patient Safety</a:t>
+              <a:t>Disciplines:  </a:t>
+            </a:r>
+            <a:pPr indent="0" marL="0">
+              <a:buNone/>
+            </a:pPr>
+            <a:r>
+              <a:rPr lang="en-US" sz="1250" dirty="0">
+                <a:solidFill>
+                  <a:srgbClr val="0C2A3D"/>
+                </a:solidFill>
+                <a:latin typeface="Calibri" pitchFamily="34" charset="0"/>
+                <a:ea typeface="Calibri" pitchFamily="34" charset="-122"/>
+                <a:cs typeface="Calibri" pitchFamily="34" charset="-120"/>
+              </a:rPr>
+              <a:t>Internal Medicine  ·  Surgery  ·  Pediatrics  ·  Obstetrics &amp; Gynecology  ·  Psychiatry  ·  Family Medicine</a:t>
             </a:r>
             <a:endParaRPr lang="en-US" sz="1250" dirty="0"/>
           </a:p>
@@ -2573,13 +2587,66 @@
       </p:sp>
       <p:sp>
         <p:nvSpPr>
-          <p:cNvPr id="52" name="Shape 49"/>
-          <p:cNvSpPr/>
-          <p:nvPr/>
-        </p:nvSpPr>
-        <p:spPr>
-          <a:xfrm>
-            <a:off x="457200" y="7351776"/>
+          <p:cNvPr id="52" name="Text 49"/>
+          <p:cNvSpPr/>
+          <p:nvPr/>
+        </p:nvSpPr>
+        <p:spPr>
+          <a:xfrm>
+            <a:off x="457200" y="7306056"/>
+            <a:ext cx="6858000" cy="502920"/>
+          </a:xfrm>
+          <a:prstGeom prst="rect">
+            <a:avLst/>
+          </a:prstGeom>
+          <a:noFill/>
+          <a:ln/>
+        </p:spPr>
+        <p:txBody>
+          <a:bodyPr wrap="square" lIns="0" tIns="0" rIns="0" bIns="0" rtlCol="0" anchor="ctr"/>
+          <a:lstStyle/>
+          <a:p>
+            <a:pPr indent="0" marL="0">
+              <a:buNone/>
+            </a:pPr>
+            <a:r>
+              <a:rPr lang="en-US" sz="1250" b="1" dirty="0">
+                <a:solidFill>
+                  <a:srgbClr val="B45309"/>
+                </a:solidFill>
+                <a:latin typeface="Calibri" pitchFamily="34" charset="0"/>
+                <a:ea typeface="Calibri" pitchFamily="34" charset="-122"/>
+                <a:cs typeface="Calibri" pitchFamily="34" charset="-120"/>
+              </a:rPr>
+              <a:t>Systems:  </a:t>
+            </a:r>
+            <a:pPr indent="0" marL="0">
+              <a:buNone/>
+            </a:pPr>
+            <a:r>
+              <a:rPr lang="en-US" sz="1250" dirty="0">
+                <a:solidFill>
+                  <a:srgbClr val="0C2A3D"/>
+                </a:solidFill>
+                <a:latin typeface="Calibri" pitchFamily="34" charset="0"/>
+                <a:ea typeface="Calibri" pitchFamily="34" charset="-122"/>
+                <a:cs typeface="Calibri" pitchFamily="34" charset="-120"/>
+              </a:rPr>
+              <a:t>Cardiovascular  ·  Gastrointestinal  ·  Respiratory  ·  MSK &amp; Skin  ·  Nervous &amp; Behavioral  ·  Endocrine  ·  Reproductive &amp; Pregnancy  ·  Renal  ·  Heme &amp; Immune  ·  Multisystem  ·  Ethics &amp; Patient Safety</a:t>
+            </a:r>
+            <a:endParaRPr lang="en-US" sz="1250" dirty="0"/>
+          </a:p>
+        </p:txBody>
+      </p:sp>
+      <p:sp>
+        <p:nvSpPr>
+          <p:cNvPr id="53" name="Shape 50"/>
+          <p:cNvSpPr/>
+          <p:nvPr/>
+        </p:nvSpPr>
+        <p:spPr>
+          <a:xfrm>
+            <a:off x="457200" y="7854696"/>
             <a:ext cx="6858000" cy="731520"/>
           </a:xfrm>
           <a:prstGeom prst="rect">
@@ -2598,13 +2665,13 @@
       </p:sp>
       <p:sp>
         <p:nvSpPr>
-          <p:cNvPr id="53" name="Shape 50"/>
-          <p:cNvSpPr/>
-          <p:nvPr/>
-        </p:nvSpPr>
-        <p:spPr>
-          <a:xfrm>
-            <a:off x="457200" y="7351776"/>
+          <p:cNvPr id="54" name="Shape 51"/>
+          <p:cNvSpPr/>
+          <p:nvPr/>
+        </p:nvSpPr>
+        <p:spPr>
+          <a:xfrm>
+            <a:off x="457200" y="7854696"/>
             <a:ext cx="91440" cy="731520"/>
           </a:xfrm>
           <a:prstGeom prst="rect">
@@ -2623,13 +2690,13 @@
       </p:sp>
       <p:sp>
         <p:nvSpPr>
-          <p:cNvPr id="54" name="Text 51"/>
-          <p:cNvSpPr/>
-          <p:nvPr/>
-        </p:nvSpPr>
-        <p:spPr>
-          <a:xfrm>
-            <a:off x="731520" y="7424928"/>
+          <p:cNvPr id="55" name="Text 52"/>
+          <p:cNvSpPr/>
+          <p:nvPr/>
+        </p:nvSpPr>
+        <p:spPr>
+          <a:xfrm>
+            <a:off x="731520" y="7927848"/>
             <a:ext cx="6492240" cy="256032"/>
           </a:xfrm>
           <a:prstGeom prst="rect">
@@ -2662,13 +2729,13 @@
       </p:sp>
       <p:sp>
         <p:nvSpPr>
-          <p:cNvPr id="55" name="Text 52"/>
-          <p:cNvSpPr/>
-          <p:nvPr/>
-        </p:nvSpPr>
-        <p:spPr>
-          <a:xfrm>
-            <a:off x="731520" y="7680960"/>
+          <p:cNvPr id="56" name="Text 53"/>
+          <p:cNvSpPr/>
+          <p:nvPr/>
+        </p:nvSpPr>
+        <p:spPr>
+          <a:xfrm>
+            <a:off x="731520" y="8183880"/>
             <a:ext cx="6492240" cy="365760"/>
           </a:xfrm>
           <a:prstGeom prst="rect">
@@ -2701,13 +2768,13 @@
       </p:sp>
       <p:sp>
         <p:nvSpPr>
-          <p:cNvPr id="56" name="Text 53"/>
-          <p:cNvSpPr/>
-          <p:nvPr/>
-        </p:nvSpPr>
-        <p:spPr>
-          <a:xfrm>
-            <a:off x="457200" y="8357616"/>
+          <p:cNvPr id="57" name="Text 54"/>
+          <p:cNvSpPr/>
+          <p:nvPr/>
+        </p:nvSpPr>
+        <p:spPr>
+          <a:xfrm>
+            <a:off x="457200" y="8732520"/>
             <a:ext cx="6858000" cy="201168"/>
           </a:xfrm>
           <a:prstGeom prst="rect">
@@ -2740,7 +2807,7 @@
       </p:sp>
       <p:pic>
         <p:nvPicPr>
-          <p:cNvPr id="57" name="Image 1" descr="email-amber.png">    </p:cNvPr>
+          <p:cNvPr id="58" name="Image 1" descr="email-amber.png">    </p:cNvPr>
           <p:cNvPicPr>
             <a:picLocks noChangeAspect="1"/>
           </p:cNvPicPr>
@@ -2754,7 +2821,7 @@
         </p:blipFill>
         <p:spPr>
           <a:xfrm>
-            <a:off x="457200" y="8604504"/>
+            <a:off x="457200" y="8979408"/>
             <a:ext cx="237744" cy="237744"/>
           </a:xfrm>
           <a:prstGeom prst="rect">
@@ -2764,13 +2831,13 @@
       </p:pic>
       <p:sp>
         <p:nvSpPr>
-          <p:cNvPr id="58" name="Text 54"/>
-          <p:cNvSpPr/>
-          <p:nvPr/>
-        </p:nvSpPr>
-        <p:spPr>
-          <a:xfrm>
-            <a:off x="768096" y="8577072"/>
+          <p:cNvPr id="59" name="Text 55"/>
+          <p:cNvSpPr/>
+          <p:nvPr/>
+        </p:nvSpPr>
+        <p:spPr>
+          <a:xfrm>
+            <a:off x="768096" y="8951976"/>
             <a:ext cx="2026310" cy="292608"/>
           </a:xfrm>
           <a:prstGeom prst="rect">
@@ -2803,7 +2870,7 @@
       </p:sp>
       <p:pic>
         <p:nvPicPr>
-          <p:cNvPr id="59" name="Image 2" descr="whatsapp.png">    </p:cNvPr>
+          <p:cNvPr id="60" name="Image 2" descr="whatsapp.png">    </p:cNvPr>
           <p:cNvPicPr>
             <a:picLocks noChangeAspect="1"/>
           </p:cNvPicPr>
@@ -2817,7 +2884,7 @@
         </p:blipFill>
         <p:spPr>
           <a:xfrm>
-            <a:off x="3048610" y="8595360"/>
+            <a:off x="3048610" y="8970264"/>
             <a:ext cx="256032" cy="256032"/>
           </a:xfrm>
           <a:prstGeom prst="rect">
@@ -2827,13 +2894,13 @@
       </p:pic>
       <p:sp>
         <p:nvSpPr>
-          <p:cNvPr id="60" name="Text 55"/>
-          <p:cNvSpPr/>
-          <p:nvPr/>
-        </p:nvSpPr>
-        <p:spPr>
-          <a:xfrm>
-            <a:off x="3377794" y="8577072"/>
+          <p:cNvPr id="61" name="Text 56"/>
+          <p:cNvSpPr/>
+          <p:nvPr/>
+        </p:nvSpPr>
+        <p:spPr>
+          <a:xfrm>
+            <a:off x="3377794" y="8951976"/>
             <a:ext cx="1437437" cy="292608"/>
           </a:xfrm>
           <a:prstGeom prst="rect">
@@ -2866,7 +2933,7 @@
       </p:sp>
       <p:pic>
         <p:nvPicPr>
-          <p:cNvPr id="61" name="Image 3" descr="phone-amber.png">    </p:cNvPr>
+          <p:cNvPr id="62" name="Image 3" descr="phone-amber.png">    </p:cNvPr>
           <p:cNvPicPr>
             <a:picLocks noChangeAspect="1"/>
           </p:cNvPicPr>
@@ -2880,7 +2947,7 @@
         </p:blipFill>
         <p:spPr>
           <a:xfrm>
-            <a:off x="5440680" y="8604504"/>
+            <a:off x="5440680" y="8979408"/>
             <a:ext cx="237744" cy="237744"/>
           </a:xfrm>
           <a:prstGeom prst="rect">
@@ -2890,13 +2957,13 @@
       </p:pic>
       <p:sp>
         <p:nvSpPr>
-          <p:cNvPr id="62" name="Text 56"/>
-          <p:cNvSpPr/>
-          <p:nvPr/>
-        </p:nvSpPr>
-        <p:spPr>
-          <a:xfrm>
-            <a:off x="5751576" y="8577072"/>
+          <p:cNvPr id="63" name="Text 57"/>
+          <p:cNvSpPr/>
+          <p:nvPr/>
+        </p:nvSpPr>
+        <p:spPr>
+          <a:xfrm>
+            <a:off x="5751576" y="8951976"/>
             <a:ext cx="1353312" cy="292608"/>
           </a:xfrm>
           <a:prstGeom prst="rect">
@@ -2929,13 +2996,13 @@
       </p:sp>
       <p:sp>
         <p:nvSpPr>
-          <p:cNvPr id="63" name="Text 57"/>
-          <p:cNvSpPr/>
-          <p:nvPr/>
-        </p:nvSpPr>
-        <p:spPr>
-          <a:xfrm>
-            <a:off x="457200" y="8924544"/>
+          <p:cNvPr id="64" name="Text 58"/>
+          <p:cNvSpPr/>
+          <p:nvPr/>
+        </p:nvSpPr>
+        <p:spPr>
+          <a:xfrm>
+            <a:off x="457200" y="9299448"/>
             <a:ext cx="6858000" cy="201168"/>
           </a:xfrm>
           <a:prstGeom prst="rect">
@@ -2968,13 +3035,13 @@
       </p:sp>
       <p:sp>
         <p:nvSpPr>
-          <p:cNvPr id="64" name="Text 58"/>
-          <p:cNvSpPr/>
-          <p:nvPr/>
-        </p:nvSpPr>
-        <p:spPr>
-          <a:xfrm>
-            <a:off x="457200" y="9107424"/>
+          <p:cNvPr id="65" name="Text 59"/>
+          <p:cNvSpPr/>
+          <p:nvPr/>
+        </p:nvSpPr>
+        <p:spPr>
+          <a:xfrm>
+            <a:off x="457200" y="9482328"/>
             <a:ext cx="6858000" cy="365760"/>
           </a:xfrm>
           <a:prstGeom prst="rect">
@@ -3007,7 +3074,7 @@
       </p:sp>
       <p:sp>
         <p:nvSpPr>
-          <p:cNvPr id="65" name="Shape 59"/>
+          <p:cNvPr id="66" name="Shape 60"/>
           <p:cNvSpPr/>
           <p:nvPr/>
         </p:nvSpPr>
@@ -3032,7 +3099,7 @@
       </p:sp>
       <p:sp>
         <p:nvSpPr>
-          <p:cNvPr id="66" name="Shape 60"/>
+          <p:cNvPr id="67" name="Shape 61"/>
           <p:cNvSpPr/>
           <p:nvPr/>
         </p:nvSpPr>

--- a/outputs/flyers/USMLE_Step2_Flyer.pptx
+++ b/outputs/flyers/USMLE_Step2_Flyer.pptx
@@ -2766,48 +2766,9 @@
           </a:p>
         </p:txBody>
       </p:sp>
-      <p:sp>
-        <p:nvSpPr>
-          <p:cNvPr id="57" name="Text 54"/>
-          <p:cNvSpPr/>
-          <p:nvPr/>
-        </p:nvSpPr>
-        <p:spPr>
-          <a:xfrm>
-            <a:off x="457200" y="8732520"/>
-            <a:ext cx="6858000" cy="201168"/>
-          </a:xfrm>
-          <a:prstGeom prst="rect">
-            <a:avLst/>
-          </a:prstGeom>
-          <a:noFill/>
-          <a:ln/>
-        </p:spPr>
-        <p:txBody>
-          <a:bodyPr wrap="square" lIns="0" tIns="0" rIns="0" bIns="0" rtlCol="0" anchor="ctr"/>
-          <a:lstStyle/>
-          <a:p>
-            <a:pPr indent="0" marL="0">
-              <a:buNone/>
-            </a:pPr>
-            <a:r>
-              <a:rPr lang="en-US" sz="1100" b="1" spc="400" kern="0" dirty="0">
-                <a:solidFill>
-                  <a:srgbClr val="B45309"/>
-                </a:solidFill>
-                <a:latin typeface="Calibri" pitchFamily="34" charset="0"/>
-                <a:ea typeface="Calibri" pitchFamily="34" charset="-122"/>
-                <a:cs typeface="Calibri" pitchFamily="34" charset="-120"/>
-              </a:rPr>
-              <a:t>TO SIGN UP, CONTACT ALLAN ON:</a:t>
-            </a:r>
-            <a:endParaRPr lang="en-US" sz="1100" dirty="0"/>
-          </a:p>
-        </p:txBody>
-      </p:sp>
       <p:pic>
         <p:nvPicPr>
-          <p:cNvPr id="58" name="Image 1" descr="email-amber.png">    </p:cNvPr>
+          <p:cNvPr id="57" name="Image 1" descr="forms_qr.png">    </p:cNvPr>
           <p:cNvPicPr>
             <a:picLocks noChangeAspect="1"/>
           </p:cNvPicPr>
@@ -2821,8 +2782,8 @@
         </p:blipFill>
         <p:spPr>
           <a:xfrm>
-            <a:off x="457200" y="8979408"/>
-            <a:ext cx="237744" cy="237744"/>
+            <a:off x="6217920" y="8732520"/>
+            <a:ext cx="1097280" cy="1097280"/>
           </a:xfrm>
           <a:prstGeom prst="rect">
             <a:avLst/>
@@ -2831,46 +2792,163 @@
       </p:pic>
       <p:sp>
         <p:nvSpPr>
-          <p:cNvPr id="59" name="Text 55"/>
-          <p:cNvSpPr/>
-          <p:nvPr/>
-        </p:nvSpPr>
-        <p:spPr>
-          <a:xfrm>
-            <a:off x="768096" y="8951976"/>
-            <a:ext cx="2026310" cy="292608"/>
-          </a:xfrm>
-          <a:prstGeom prst="rect">
-            <a:avLst/>
-          </a:prstGeom>
-          <a:noFill/>
-          <a:ln/>
-        </p:spPr>
-        <p:txBody>
-          <a:bodyPr wrap="square" lIns="0" tIns="0" rIns="0" bIns="0" rtlCol="0" anchor="ctr"/>
-          <a:lstStyle/>
-          <a:p>
-            <a:pPr algn="l" indent="0" marL="0">
-              <a:buNone/>
-            </a:pPr>
-            <a:r>
-              <a:rPr lang="en-US" sz="1200" b="1" dirty="0">
-                <a:solidFill>
-                  <a:srgbClr val="0C2A3D"/>
+          <p:cNvPr id="58" name="Text 54"/>
+          <p:cNvSpPr/>
+          <p:nvPr/>
+        </p:nvSpPr>
+        <p:spPr>
+          <a:xfrm>
+            <a:off x="6217920" y="9793224"/>
+            <a:ext cx="1097280" cy="146304"/>
+          </a:xfrm>
+          <a:prstGeom prst="rect">
+            <a:avLst/>
+          </a:prstGeom>
+          <a:noFill/>
+          <a:ln/>
+        </p:spPr>
+        <p:txBody>
+          <a:bodyPr wrap="square" lIns="0" tIns="0" rIns="0" bIns="0" rtlCol="0" anchor="ctr"/>
+          <a:lstStyle/>
+          <a:p>
+            <a:pPr algn="ctr" indent="0" marL="0">
+              <a:buNone/>
+            </a:pPr>
+            <a:r>
+              <a:rPr lang="en-US" sz="800" i="1" dirty="0">
+                <a:solidFill>
+                  <a:srgbClr val="B45309"/>
                 </a:solidFill>
                 <a:latin typeface="Calibri" pitchFamily="34" charset="0"/>
                 <a:ea typeface="Calibri" pitchFamily="34" charset="-122"/>
                 <a:cs typeface="Calibri" pitchFamily="34" charset="-120"/>
               </a:rPr>
-              <a:t>allanbakesiga@gmail.com</a:t>
-            </a:r>
-            <a:endParaRPr lang="en-US" sz="1200" dirty="0"/>
+              <a:t>scan to sign up</a:t>
+            </a:r>
+            <a:endParaRPr lang="en-US" sz="800" dirty="0"/>
+          </a:p>
+        </p:txBody>
+      </p:sp>
+      <p:sp>
+        <p:nvSpPr>
+          <p:cNvPr id="59" name="Text 55"/>
+          <p:cNvSpPr/>
+          <p:nvPr/>
+        </p:nvSpPr>
+        <p:spPr>
+          <a:xfrm>
+            <a:off x="457200" y="8732520"/>
+            <a:ext cx="5577840" cy="201168"/>
+          </a:xfrm>
+          <a:prstGeom prst="rect">
+            <a:avLst/>
+          </a:prstGeom>
+          <a:noFill/>
+          <a:ln/>
+        </p:spPr>
+        <p:txBody>
+          <a:bodyPr wrap="square" lIns="0" tIns="0" rIns="0" bIns="0" rtlCol="0" anchor="ctr"/>
+          <a:lstStyle/>
+          <a:p>
+            <a:pPr indent="0" marL="0">
+              <a:buNone/>
+            </a:pPr>
+            <a:r>
+              <a:rPr lang="en-US" sz="1100" b="1" spc="400" kern="0" dirty="0">
+                <a:solidFill>
+                  <a:srgbClr val="B45309"/>
+                </a:solidFill>
+                <a:latin typeface="Calibri" pitchFamily="34" charset="0"/>
+                <a:ea typeface="Calibri" pitchFamily="34" charset="-122"/>
+                <a:cs typeface="Calibri" pitchFamily="34" charset="-120"/>
+              </a:rPr>
+              <a:t>SIGN UP HERE</a:t>
+            </a:r>
+            <a:endParaRPr lang="en-US" sz="1100" dirty="0"/>
+          </a:p>
+        </p:txBody>
+      </p:sp>
+      <p:sp>
+        <p:nvSpPr>
+          <p:cNvPr id="60" name="Text 56"/>
+          <p:cNvSpPr/>
+          <p:nvPr/>
+        </p:nvSpPr>
+        <p:spPr>
+          <a:xfrm>
+            <a:off x="457200" y="8915400"/>
+            <a:ext cx="5577840" cy="420624"/>
+          </a:xfrm>
+          <a:prstGeom prst="rect">
+            <a:avLst/>
+          </a:prstGeom>
+          <a:noFill/>
+          <a:ln/>
+        </p:spPr>
+        <p:txBody>
+          <a:bodyPr wrap="square" lIns="0" tIns="0" rIns="0" bIns="0" rtlCol="0" anchor="ctr"/>
+          <a:lstStyle/>
+          <a:p>
+            <a:pPr indent="0" marL="0">
+              <a:buNone/>
+            </a:pPr>
+            <a:r>
+              <a:rPr lang="en-US" sz="2200" b="1" dirty="0">
+                <a:solidFill>
+                  <a:srgbClr val="D97706"/>
+                </a:solidFill>
+                <a:latin typeface="Arial Black" pitchFamily="34" charset="0"/>
+                <a:ea typeface="Arial Black" pitchFamily="34" charset="-122"/>
+                <a:cs typeface="Arial Black" pitchFamily="34" charset="-120"/>
+              </a:rPr>
+              <a:t>forms.gle/Pj4tB985kpZGBKN59</a:t>
+            </a:r>
+            <a:endParaRPr lang="en-US" sz="2200" dirty="0"/>
+          </a:p>
+        </p:txBody>
+      </p:sp>
+      <p:sp>
+        <p:nvSpPr>
+          <p:cNvPr id="61" name="Text 57"/>
+          <p:cNvSpPr/>
+          <p:nvPr/>
+        </p:nvSpPr>
+        <p:spPr>
+          <a:xfrm>
+            <a:off x="457200" y="9390888"/>
+            <a:ext cx="5577840" cy="201168"/>
+          </a:xfrm>
+          <a:prstGeom prst="rect">
+            <a:avLst/>
+          </a:prstGeom>
+          <a:noFill/>
+          <a:ln/>
+        </p:spPr>
+        <p:txBody>
+          <a:bodyPr wrap="square" lIns="0" tIns="0" rIns="0" bIns="0" rtlCol="0" anchor="ctr"/>
+          <a:lstStyle/>
+          <a:p>
+            <a:pPr indent="0" marL="0">
+              <a:buNone/>
+            </a:pPr>
+            <a:r>
+              <a:rPr lang="en-US" sz="1050" i="1" dirty="0">
+                <a:solidFill>
+                  <a:srgbClr val="345671"/>
+                </a:solidFill>
+                <a:latin typeface="Calibri" pitchFamily="34" charset="0"/>
+                <a:ea typeface="Calibri" pitchFamily="34" charset="-122"/>
+                <a:cs typeface="Calibri" pitchFamily="34" charset="-120"/>
+              </a:rPr>
+              <a:t>Questions? Reach out to Allan:</a:t>
+            </a:r>
+            <a:endParaRPr lang="en-US" sz="1050" dirty="0"/>
           </a:p>
         </p:txBody>
       </p:sp>
       <p:pic>
         <p:nvPicPr>
-          <p:cNvPr id="60" name="Image 2" descr="whatsapp.png">    </p:cNvPr>
+          <p:cNvPr id="62" name="Image 2" descr="email-amber.png">    </p:cNvPr>
           <p:cNvPicPr>
             <a:picLocks noChangeAspect="1"/>
           </p:cNvPicPr>
@@ -2884,8 +2962,8 @@
         </p:blipFill>
         <p:spPr>
           <a:xfrm>
-            <a:off x="3048610" y="8970264"/>
-            <a:ext cx="256032" cy="256032"/>
+            <a:off x="457200" y="9610344"/>
+            <a:ext cx="182880" cy="182880"/>
           </a:xfrm>
           <a:prstGeom prst="rect">
             <a:avLst/>
@@ -2894,14 +2972,14 @@
       </p:pic>
       <p:sp>
         <p:nvSpPr>
-          <p:cNvPr id="61" name="Text 56"/>
-          <p:cNvSpPr/>
-          <p:nvPr/>
-        </p:nvSpPr>
-        <p:spPr>
-          <a:xfrm>
-            <a:off x="3377794" y="8951976"/>
-            <a:ext cx="1437437" cy="292608"/>
+          <p:cNvPr id="63" name="Text 58"/>
+          <p:cNvSpPr/>
+          <p:nvPr/>
+        </p:nvSpPr>
+        <p:spPr>
+          <a:xfrm>
+            <a:off x="694944" y="9592056"/>
+            <a:ext cx="1668780" cy="219456"/>
           </a:xfrm>
           <a:prstGeom prst="rect">
             <a:avLst/>
@@ -2917,7 +2995,7 @@
               <a:buNone/>
             </a:pPr>
             <a:r>
-              <a:rPr lang="en-US" sz="1200" b="1" dirty="0">
+              <a:rPr lang="en-US" sz="1000" b="1" dirty="0">
                 <a:solidFill>
                   <a:srgbClr val="0C2A3D"/>
                 </a:solidFill>
@@ -2925,15 +3003,15 @@
                 <a:ea typeface="Calibri" pitchFamily="34" charset="-122"/>
                 <a:cs typeface="Calibri" pitchFamily="34" charset="-120"/>
               </a:rPr>
-              <a:t>+256 705 571 443</a:t>
-            </a:r>
-            <a:endParaRPr lang="en-US" sz="1200" dirty="0"/>
+              <a:t>allanbakesiga@gmail.com</a:t>
+            </a:r>
+            <a:endParaRPr lang="en-US" sz="1000" dirty="0"/>
           </a:p>
         </p:txBody>
       </p:sp>
       <p:pic>
         <p:nvPicPr>
-          <p:cNvPr id="62" name="Image 3" descr="phone-amber.png">    </p:cNvPr>
+          <p:cNvPr id="64" name="Image 3" descr="whatsapp.png">    </p:cNvPr>
           <p:cNvPicPr>
             <a:picLocks noChangeAspect="1"/>
           </p:cNvPicPr>
@@ -2947,8 +3025,8 @@
         </p:blipFill>
         <p:spPr>
           <a:xfrm>
-            <a:off x="5440680" y="8979408"/>
-            <a:ext cx="237744" cy="237744"/>
+            <a:off x="2569464" y="9601200"/>
+            <a:ext cx="201168" cy="201168"/>
           </a:xfrm>
           <a:prstGeom prst="rect">
             <a:avLst/>
@@ -2957,14 +3035,14 @@
       </p:pic>
       <p:sp>
         <p:nvSpPr>
-          <p:cNvPr id="63" name="Text 57"/>
-          <p:cNvSpPr/>
-          <p:nvPr/>
-        </p:nvSpPr>
-        <p:spPr>
-          <a:xfrm>
-            <a:off x="5751576" y="8951976"/>
-            <a:ext cx="1353312" cy="292608"/>
+          <p:cNvPr id="65" name="Text 59"/>
+          <p:cNvSpPr/>
+          <p:nvPr/>
+        </p:nvSpPr>
+        <p:spPr>
+          <a:xfrm>
+            <a:off x="2825496" y="9592056"/>
+            <a:ext cx="1188720" cy="219456"/>
           </a:xfrm>
           <a:prstGeom prst="rect">
             <a:avLst/>
@@ -2980,7 +3058,7 @@
               <a:buNone/>
             </a:pPr>
             <a:r>
-              <a:rPr lang="en-US" sz="1200" b="1" dirty="0">
+              <a:rPr lang="en-US" sz="1000" b="1" dirty="0">
                 <a:solidFill>
                   <a:srgbClr val="0C2A3D"/>
                 </a:solidFill>
@@ -2988,93 +3066,78 @@
                 <a:ea typeface="Calibri" pitchFamily="34" charset="-122"/>
                 <a:cs typeface="Calibri" pitchFamily="34" charset="-120"/>
               </a:rPr>
-              <a:t>+1 984 710 2902</a:t>
-            </a:r>
-            <a:endParaRPr lang="en-US" sz="1200" dirty="0"/>
-          </a:p>
-        </p:txBody>
-      </p:sp>
-      <p:sp>
-        <p:nvSpPr>
-          <p:cNvPr id="64" name="Text 58"/>
-          <p:cNvSpPr/>
-          <p:nvPr/>
-        </p:nvSpPr>
-        <p:spPr>
-          <a:xfrm>
-            <a:off x="457200" y="9299448"/>
-            <a:ext cx="6858000" cy="201168"/>
-          </a:xfrm>
-          <a:prstGeom prst="rect">
-            <a:avLst/>
-          </a:prstGeom>
-          <a:noFill/>
-          <a:ln/>
-        </p:spPr>
-        <p:txBody>
-          <a:bodyPr wrap="square" lIns="0" tIns="0" rIns="0" bIns="0" rtlCol="0" anchor="ctr"/>
-          <a:lstStyle/>
-          <a:p>
-            <a:pPr indent="0" marL="0">
-              <a:buNone/>
-            </a:pPr>
-            <a:r>
-              <a:rPr lang="en-US" sz="1050" i="1" dirty="0">
-                <a:solidFill>
-                  <a:srgbClr val="345671"/>
+              <a:t>+256 705 571 443</a:t>
+            </a:r>
+            <a:endParaRPr lang="en-US" sz="1000" dirty="0"/>
+          </a:p>
+        </p:txBody>
+      </p:sp>
+      <p:pic>
+        <p:nvPicPr>
+          <p:cNvPr id="66" name="Image 4" descr="phone-amber.png">    </p:cNvPr>
+          <p:cNvPicPr>
+            <a:picLocks noChangeAspect="1"/>
+          </p:cNvPicPr>
+          <p:nvPr/>
+        </p:nvPicPr>
+        <p:blipFill>
+          <a:blip r:embed="rId5"/>
+          <a:stretch>
+            <a:fillRect/>
+          </a:stretch>
+        </p:blipFill>
+        <p:spPr>
+          <a:xfrm>
+            <a:off x="4502658" y="9610344"/>
+            <a:ext cx="182880" cy="182880"/>
+          </a:xfrm>
+          <a:prstGeom prst="rect">
+            <a:avLst/>
+          </a:prstGeom>
+        </p:spPr>
+      </p:pic>
+      <p:sp>
+        <p:nvSpPr>
+          <p:cNvPr id="67" name="Text 60"/>
+          <p:cNvSpPr/>
+          <p:nvPr/>
+        </p:nvSpPr>
+        <p:spPr>
+          <a:xfrm>
+            <a:off x="4740402" y="9592056"/>
+            <a:ext cx="1120140" cy="219456"/>
+          </a:xfrm>
+          <a:prstGeom prst="rect">
+            <a:avLst/>
+          </a:prstGeom>
+          <a:noFill/>
+          <a:ln/>
+        </p:spPr>
+        <p:txBody>
+          <a:bodyPr wrap="square" lIns="0" tIns="0" rIns="0" bIns="0" rtlCol="0" anchor="ctr"/>
+          <a:lstStyle/>
+          <a:p>
+            <a:pPr algn="l" indent="0" marL="0">
+              <a:buNone/>
+            </a:pPr>
+            <a:r>
+              <a:rPr lang="en-US" sz="1000" b="1" dirty="0">
+                <a:solidFill>
+                  <a:srgbClr val="0C2A3D"/>
                 </a:solidFill>
                 <a:latin typeface="Calibri" pitchFamily="34" charset="0"/>
                 <a:ea typeface="Calibri" pitchFamily="34" charset="-122"/>
                 <a:cs typeface="Calibri" pitchFamily="34" charset="-120"/>
               </a:rPr>
-              <a:t>Once enrolled, you'll be granted access to all course materials at:</a:t>
-            </a:r>
-            <a:endParaRPr lang="en-US" sz="1050" dirty="0"/>
-          </a:p>
-        </p:txBody>
-      </p:sp>
-      <p:sp>
-        <p:nvSpPr>
-          <p:cNvPr id="65" name="Text 59"/>
-          <p:cNvSpPr/>
-          <p:nvPr/>
-        </p:nvSpPr>
-        <p:spPr>
-          <a:xfrm>
-            <a:off x="457200" y="9482328"/>
-            <a:ext cx="6858000" cy="365760"/>
-          </a:xfrm>
-          <a:prstGeom prst="rect">
-            <a:avLst/>
-          </a:prstGeom>
-          <a:noFill/>
-          <a:ln/>
-        </p:spPr>
-        <p:txBody>
-          <a:bodyPr wrap="square" lIns="0" tIns="0" rIns="0" bIns="0" rtlCol="0" anchor="ctr"/>
-          <a:lstStyle/>
-          <a:p>
-            <a:pPr indent="0" marL="0">
-              <a:buNone/>
-            </a:pPr>
-            <a:r>
-              <a:rPr lang="en-US" sz="2200" b="1" dirty="0">
-                <a:solidFill>
-                  <a:srgbClr val="D97706"/>
-                </a:solidFill>
-                <a:latin typeface="Arial Black" pitchFamily="34" charset="0"/>
-                <a:ea typeface="Arial Black" pitchFamily="34" charset="-122"/>
-                <a:cs typeface="Arial Black" pitchFamily="34" charset="-120"/>
-              </a:rPr>
-              <a:t>bakesiga.github.io/usmle-dashboard</a:t>
-            </a:r>
-            <a:endParaRPr lang="en-US" sz="2200" dirty="0"/>
-          </a:p>
-        </p:txBody>
-      </p:sp>
-      <p:sp>
-        <p:nvSpPr>
-          <p:cNvPr id="66" name="Shape 60"/>
+              <a:t>+1 984 710 2902</a:t>
+            </a:r>
+            <a:endParaRPr lang="en-US" sz="1000" dirty="0"/>
+          </a:p>
+        </p:txBody>
+      </p:sp>
+      <p:sp>
+        <p:nvSpPr>
+          <p:cNvPr id="68" name="Shape 61"/>
           <p:cNvSpPr/>
           <p:nvPr/>
         </p:nvSpPr>
@@ -3099,7 +3162,7 @@
       </p:sp>
       <p:sp>
         <p:nvSpPr>
-          <p:cNvPr id="67" name="Shape 61"/>
+          <p:cNvPr id="69" name="Shape 62"/>
           <p:cNvSpPr/>
           <p:nvPr/>
         </p:nvSpPr>

--- a/outputs/flyers/USMLE_Step2_Flyer.pptx
+++ b/outputs/flyers/USMLE_Step2_Flyer.pptx
@@ -2782,8 +2782,8 @@
         </p:blipFill>
         <p:spPr>
           <a:xfrm>
-            <a:off x="6217920" y="8732520"/>
-            <a:ext cx="1097280" cy="1097280"/>
+            <a:off x="6400800" y="8732520"/>
+            <a:ext cx="914400" cy="914400"/>
           </a:xfrm>
           <a:prstGeom prst="rect">
             <a:avLst/>
@@ -2798,8 +2798,8 @@
         </p:nvSpPr>
         <p:spPr>
           <a:xfrm>
-            <a:off x="6217920" y="9793224"/>
-            <a:ext cx="1097280" cy="146304"/>
+            <a:off x="6400800" y="9683496"/>
+            <a:ext cx="914400" cy="182880"/>
           </a:xfrm>
           <a:prstGeom prst="rect">
             <a:avLst/>
@@ -2815,7 +2815,7 @@
               <a:buNone/>
             </a:pPr>
             <a:r>
-              <a:rPr lang="en-US" sz="800" i="1" dirty="0">
+              <a:rPr lang="en-US" sz="1000" b="1" i="1" dirty="0">
                 <a:solidFill>
                   <a:srgbClr val="B45309"/>
                 </a:solidFill>
@@ -2823,9 +2823,9 @@
                 <a:ea typeface="Calibri" pitchFamily="34" charset="-122"/>
                 <a:cs typeface="Calibri" pitchFamily="34" charset="-120"/>
               </a:rPr>
-              <a:t>scan to sign up</a:t>
-            </a:r>
-            <a:endParaRPr lang="en-US" sz="800" dirty="0"/>
+              <a:t>Scan to sign up</a:t>
+            </a:r>
+            <a:endParaRPr lang="en-US" sz="1000" dirty="0"/>
           </a:p>
         </p:txBody>
       </p:sp>
@@ -2838,7 +2838,7 @@
         <p:spPr>
           <a:xfrm>
             <a:off x="457200" y="8732520"/>
-            <a:ext cx="5577840" cy="201168"/>
+            <a:ext cx="5760720" cy="201168"/>
           </a:xfrm>
           <a:prstGeom prst="rect">
             <a:avLst/>
@@ -2877,7 +2877,7 @@
         <p:spPr>
           <a:xfrm>
             <a:off x="457200" y="8915400"/>
-            <a:ext cx="5577840" cy="420624"/>
+            <a:ext cx="5760720" cy="420624"/>
           </a:xfrm>
           <a:prstGeom prst="rect">
             <a:avLst/>
@@ -2916,7 +2916,7 @@
         <p:spPr>
           <a:xfrm>
             <a:off x="457200" y="9390888"/>
-            <a:ext cx="5577840" cy="201168"/>
+            <a:ext cx="5760720" cy="201168"/>
           </a:xfrm>
           <a:prstGeom prst="rect">
             <a:avLst/>
@@ -2962,7 +2962,7 @@
         </p:blipFill>
         <p:spPr>
           <a:xfrm>
-            <a:off x="457200" y="9610344"/>
+            <a:off x="479298" y="9610344"/>
             <a:ext cx="182880" cy="182880"/>
           </a:xfrm>
           <a:prstGeom prst="rect">
@@ -2978,7 +2978,7 @@
         </p:nvSpPr>
         <p:spPr>
           <a:xfrm>
-            <a:off x="694944" y="9592056"/>
+            <a:off x="717042" y="9592056"/>
             <a:ext cx="1668780" cy="219456"/>
           </a:xfrm>
           <a:prstGeom prst="rect">
@@ -3025,7 +3025,7 @@
         </p:blipFill>
         <p:spPr>
           <a:xfrm>
-            <a:off x="2569464" y="9601200"/>
+            <a:off x="2660904" y="9601200"/>
             <a:ext cx="201168" cy="201168"/>
           </a:xfrm>
           <a:prstGeom prst="rect">
@@ -3041,7 +3041,7 @@
         </p:nvSpPr>
         <p:spPr>
           <a:xfrm>
-            <a:off x="2825496" y="9592056"/>
+            <a:off x="2916936" y="9592056"/>
             <a:ext cx="1188720" cy="219456"/>
           </a:xfrm>
           <a:prstGeom prst="rect">
@@ -3088,7 +3088,7 @@
         </p:blipFill>
         <p:spPr>
           <a:xfrm>
-            <a:off x="4502658" y="9610344"/>
+            <a:off x="4655058" y="9610344"/>
             <a:ext cx="182880" cy="182880"/>
           </a:xfrm>
           <a:prstGeom prst="rect">
@@ -3104,7 +3104,7 @@
         </p:nvSpPr>
         <p:spPr>
           <a:xfrm>
-            <a:off x="4740402" y="9592056"/>
+            <a:off x="4892802" y="9592056"/>
             <a:ext cx="1120140" cy="219456"/>
           </a:xfrm>
           <a:prstGeom prst="rect">
